--- a/native/HDDS_시안전략_V1.0.pptx
+++ b/native/HDDS_시안전략_V1.0.pptx
@@ -4047,42 +4047,112 @@
         </p:nvSpPr>
         <p:spPr>
           <a:xfrm>
-            <a:off x="365750" y="274320"/>
-            <a:ext cx="10972525" cy="480060"/>
-          </a:xfrm>
-          <a:prstGeom prst="rect">
-            <a:avLst/>
-          </a:prstGeom>
-          <a:noFill/>
-        </p:spPr>
-        <p:txBody>
-          <a:bodyPr wrap="square" lIns="36000" rIns="36000" tIns="18000" bIns="18000">
-            <a:spAutoFit/>
-          </a:bodyPr>
-          <a:lstStyle/>
-          <a:p>
-            <a:pPr algn="l"/>
-            <a:r>
-              <a:rPr sz="1700" b="1">
+            <a:off x="487667" y="137160"/>
+            <a:ext cx="7315017" cy="274320"/>
+          </a:xfrm>
+          <a:prstGeom prst="rect">
+            <a:avLst/>
+          </a:prstGeom>
+          <a:noFill/>
+        </p:spPr>
+        <p:txBody>
+          <a:bodyPr wrap="square" lIns="36000" rIns="36000" tIns="18000" bIns="18000">
+            <a:spAutoFit/>
+          </a:bodyPr>
+          <a:lstStyle/>
+          <a:p>
+            <a:pPr algn="l"/>
+            <a:r>
+              <a:rPr sz="900" b="0">
+                <a:solidFill>
+                  <a:srgbClr val="767676"/>
+                </a:solidFill>
+                <a:latin typeface="Pretendard"/>
+              </a:rPr>
+              <a:t>디자인 시안전략</a:t>
+            </a:r>
+          </a:p>
+        </p:txBody>
+      </p:sp>
+      <p:sp>
+        <p:nvSpPr>
+          <p:cNvPr id="3" name="TextBox 2"/>
+          <p:cNvSpPr txBox="1"/>
+          <p:nvPr/>
+        </p:nvSpPr>
+        <p:spPr>
+          <a:xfrm>
+            <a:off x="487667" y="548640"/>
+            <a:ext cx="11216359" cy="548640"/>
+          </a:xfrm>
+          <a:prstGeom prst="rect">
+            <a:avLst/>
+          </a:prstGeom>
+          <a:noFill/>
+        </p:spPr>
+        <p:txBody>
+          <a:bodyPr wrap="square" lIns="36000" rIns="36000" tIns="18000" bIns="18000">
+            <a:spAutoFit/>
+          </a:bodyPr>
+          <a:lstStyle/>
+          <a:p>
+            <a:pPr algn="l"/>
+            <a:r>
+              <a:rPr sz="2400" b="1">
                 <a:solidFill>
                   <a:srgbClr val="1A1A1A"/>
                 </a:solidFill>
                 <a:latin typeface="Pretendard"/>
               </a:rPr>
-              <a:t>1. ⚠️ 감성 근거가 없다 — 대체 4순위로 채웠다</a:t>
-            </a:r>
-          </a:p>
-        </p:txBody>
-      </p:sp>
-      <p:sp>
-        <p:nvSpPr>
-          <p:cNvPr id="3" name="Rectangle 2"/>
+              <a:t>⚠️ 감성 근거가 없다</a:t>
+            </a:r>
+          </a:p>
+        </p:txBody>
+      </p:sp>
+      <p:sp>
+        <p:nvSpPr>
+          <p:cNvPr id="4" name="TextBox 3"/>
+          <p:cNvSpPr txBox="1"/>
+          <p:nvPr/>
+        </p:nvSpPr>
+        <p:spPr>
+          <a:xfrm>
+            <a:off x="487667" y="1097280"/>
+            <a:ext cx="11216359" cy="377190"/>
+          </a:xfrm>
+          <a:prstGeom prst="rect">
+            <a:avLst/>
+          </a:prstGeom>
+          <a:noFill/>
+        </p:spPr>
+        <p:txBody>
+          <a:bodyPr wrap="square" lIns="36000" rIns="36000" tIns="18000" bIns="18000">
+            <a:spAutoFit/>
+          </a:bodyPr>
+          <a:lstStyle/>
+          <a:p>
+            <a:pPr algn="l"/>
+            <a:r>
+              <a:rPr sz="1200" b="0">
+                <a:solidFill>
+                  <a:srgbClr val="767676"/>
+                </a:solidFill>
+                <a:latin typeface="Pretendard"/>
+              </a:rPr>
+              <a:t>대체 4순위로 채웠다</a:t>
+            </a:r>
+          </a:p>
+        </p:txBody>
+      </p:sp>
+      <p:sp>
+        <p:nvSpPr>
+          <p:cNvPr id="5" name="Rectangle 4"/>
           <p:cNvSpPr/>
           <p:nvPr/>
         </p:nvSpPr>
         <p:spPr>
           <a:xfrm>
-            <a:off x="365750" y="891540"/>
+            <a:off x="487667" y="1577340"/>
             <a:ext cx="2804089" cy="377190"/>
           </a:xfrm>
           <a:prstGeom prst="rect">
@@ -4122,13 +4192,13 @@
       </p:sp>
       <p:sp>
         <p:nvSpPr>
-          <p:cNvPr id="4" name="TextBox 3"/>
-          <p:cNvSpPr txBox="1"/>
-          <p:nvPr/>
-        </p:nvSpPr>
-        <p:spPr>
-          <a:xfrm>
-            <a:off x="365750" y="946404"/>
+          <p:cNvPr id="6" name="TextBox 5"/>
+          <p:cNvSpPr txBox="1"/>
+          <p:nvPr/>
+        </p:nvSpPr>
+        <p:spPr>
+          <a:xfrm>
+            <a:off x="487667" y="1632204"/>
             <a:ext cx="2804089" cy="301752"/>
           </a:xfrm>
           <a:prstGeom prst="rect">
@@ -4157,13 +4227,13 @@
       </p:sp>
       <p:sp>
         <p:nvSpPr>
-          <p:cNvPr id="5" name="Rectangle 4"/>
+          <p:cNvPr id="7" name="Rectangle 6"/>
           <p:cNvSpPr/>
           <p:nvPr/>
         </p:nvSpPr>
         <p:spPr>
           <a:xfrm>
-            <a:off x="3169840" y="891540"/>
+            <a:off x="3291757" y="1577340"/>
             <a:ext cx="2804089" cy="377190"/>
           </a:xfrm>
           <a:prstGeom prst="rect">
@@ -4203,13 +4273,13 @@
       </p:sp>
       <p:sp>
         <p:nvSpPr>
-          <p:cNvPr id="6" name="TextBox 5"/>
-          <p:cNvSpPr txBox="1"/>
-          <p:nvPr/>
-        </p:nvSpPr>
-        <p:spPr>
-          <a:xfrm>
-            <a:off x="3169840" y="946404"/>
+          <p:cNvPr id="8" name="TextBox 7"/>
+          <p:cNvSpPr txBox="1"/>
+          <p:nvPr/>
+        </p:nvSpPr>
+        <p:spPr>
+          <a:xfrm>
+            <a:off x="3291757" y="1632204"/>
             <a:ext cx="2804089" cy="301752"/>
           </a:xfrm>
           <a:prstGeom prst="rect">
@@ -4238,13 +4308,13 @@
       </p:sp>
       <p:sp>
         <p:nvSpPr>
-          <p:cNvPr id="7" name="Rectangle 6"/>
+          <p:cNvPr id="9" name="Rectangle 8"/>
           <p:cNvSpPr/>
           <p:nvPr/>
         </p:nvSpPr>
         <p:spPr>
           <a:xfrm>
-            <a:off x="5973930" y="891540"/>
+            <a:off x="6095847" y="1577340"/>
             <a:ext cx="2804089" cy="377190"/>
           </a:xfrm>
           <a:prstGeom prst="rect">
@@ -4284,13 +4354,13 @@
       </p:sp>
       <p:sp>
         <p:nvSpPr>
-          <p:cNvPr id="8" name="TextBox 7"/>
-          <p:cNvSpPr txBox="1"/>
-          <p:nvPr/>
-        </p:nvSpPr>
-        <p:spPr>
-          <a:xfrm>
-            <a:off x="5973930" y="946404"/>
+          <p:cNvPr id="10" name="TextBox 9"/>
+          <p:cNvSpPr txBox="1"/>
+          <p:nvPr/>
+        </p:nvSpPr>
+        <p:spPr>
+          <a:xfrm>
+            <a:off x="6095847" y="1632204"/>
             <a:ext cx="2804089" cy="301752"/>
           </a:xfrm>
           <a:prstGeom prst="rect">
@@ -4319,13 +4389,13 @@
       </p:sp>
       <p:sp>
         <p:nvSpPr>
-          <p:cNvPr id="9" name="Rectangle 8"/>
+          <p:cNvPr id="11" name="Rectangle 10"/>
           <p:cNvSpPr/>
           <p:nvPr/>
         </p:nvSpPr>
         <p:spPr>
           <a:xfrm>
-            <a:off x="8778020" y="891540"/>
+            <a:off x="8899937" y="1577340"/>
             <a:ext cx="2804089" cy="377190"/>
           </a:xfrm>
           <a:prstGeom prst="rect">
@@ -4365,13 +4435,13 @@
       </p:sp>
       <p:sp>
         <p:nvSpPr>
-          <p:cNvPr id="10" name="TextBox 9"/>
-          <p:cNvSpPr txBox="1"/>
-          <p:nvPr/>
-        </p:nvSpPr>
-        <p:spPr>
-          <a:xfrm>
-            <a:off x="8778020" y="946404"/>
+          <p:cNvPr id="12" name="TextBox 11"/>
+          <p:cNvSpPr txBox="1"/>
+          <p:nvPr/>
+        </p:nvSpPr>
+        <p:spPr>
+          <a:xfrm>
+            <a:off x="8899937" y="1632204"/>
             <a:ext cx="2804089" cy="301752"/>
           </a:xfrm>
           <a:prstGeom prst="rect">
@@ -4400,13 +4470,13 @@
       </p:sp>
       <p:sp>
         <p:nvSpPr>
-          <p:cNvPr id="11" name="Rectangle 10"/>
+          <p:cNvPr id="13" name="Rectangle 12"/>
           <p:cNvSpPr/>
           <p:nvPr/>
         </p:nvSpPr>
         <p:spPr>
           <a:xfrm>
-            <a:off x="365750" y="1268730"/>
+            <a:off x="487667" y="1954530"/>
             <a:ext cx="2804089" cy="534924"/>
           </a:xfrm>
           <a:prstGeom prst="rect">
@@ -4446,13 +4516,13 @@
       </p:sp>
       <p:sp>
         <p:nvSpPr>
-          <p:cNvPr id="12" name="TextBox 11"/>
-          <p:cNvSpPr txBox="1"/>
-          <p:nvPr/>
-        </p:nvSpPr>
-        <p:spPr>
-          <a:xfrm>
-            <a:off x="365750" y="1296161"/>
+          <p:cNvPr id="14" name="TextBox 13"/>
+          <p:cNvSpPr txBox="1"/>
+          <p:nvPr/>
+        </p:nvSpPr>
+        <p:spPr>
+          <a:xfrm>
+            <a:off x="487667" y="1981962"/>
             <a:ext cx="2804089" cy="480060"/>
           </a:xfrm>
           <a:prstGeom prst="rect">
@@ -4468,7 +4538,7 @@
           <a:p>
             <a:pPr algn="l"/>
             <a:r>
-              <a:rPr sz="750" b="0">
+              <a:rPr sz="800" b="0">
                 <a:solidFill>
                   <a:srgbClr val="1A1A1A"/>
                 </a:solidFill>
@@ -4481,13 +4551,13 @@
       </p:sp>
       <p:sp>
         <p:nvSpPr>
-          <p:cNvPr id="13" name="Rectangle 12"/>
+          <p:cNvPr id="15" name="Rectangle 14"/>
           <p:cNvSpPr/>
           <p:nvPr/>
         </p:nvSpPr>
         <p:spPr>
           <a:xfrm>
-            <a:off x="3169840" y="1268730"/>
+            <a:off x="3291757" y="1954530"/>
             <a:ext cx="2804089" cy="534924"/>
           </a:xfrm>
           <a:prstGeom prst="rect">
@@ -4527,13 +4597,13 @@
       </p:sp>
       <p:sp>
         <p:nvSpPr>
-          <p:cNvPr id="14" name="TextBox 13"/>
-          <p:cNvSpPr txBox="1"/>
-          <p:nvPr/>
-        </p:nvSpPr>
-        <p:spPr>
-          <a:xfrm>
-            <a:off x="3169840" y="1296161"/>
+          <p:cNvPr id="16" name="TextBox 15"/>
+          <p:cNvSpPr txBox="1"/>
+          <p:nvPr/>
+        </p:nvSpPr>
+        <p:spPr>
+          <a:xfrm>
+            <a:off x="3291757" y="1981962"/>
             <a:ext cx="2804089" cy="480060"/>
           </a:xfrm>
           <a:prstGeom prst="rect">
@@ -4549,7 +4619,7 @@
           <a:p>
             <a:pPr algn="l"/>
             <a:r>
-              <a:rPr sz="750" b="0">
+              <a:rPr sz="800" b="0">
                 <a:solidFill>
                   <a:srgbClr val="1A1A1A"/>
                 </a:solidFill>
@@ -4562,13 +4632,13 @@
       </p:sp>
       <p:sp>
         <p:nvSpPr>
-          <p:cNvPr id="15" name="Rectangle 14"/>
+          <p:cNvPr id="17" name="Rectangle 16"/>
           <p:cNvSpPr/>
           <p:nvPr/>
         </p:nvSpPr>
         <p:spPr>
           <a:xfrm>
-            <a:off x="5973930" y="1268730"/>
+            <a:off x="6095847" y="1954530"/>
             <a:ext cx="2804089" cy="534924"/>
           </a:xfrm>
           <a:prstGeom prst="rect">
@@ -4608,13 +4678,13 @@
       </p:sp>
       <p:sp>
         <p:nvSpPr>
-          <p:cNvPr id="16" name="TextBox 15"/>
-          <p:cNvSpPr txBox="1"/>
-          <p:nvPr/>
-        </p:nvSpPr>
-        <p:spPr>
-          <a:xfrm>
-            <a:off x="5973930" y="1296161"/>
+          <p:cNvPr id="18" name="TextBox 17"/>
+          <p:cNvSpPr txBox="1"/>
+          <p:nvPr/>
+        </p:nvSpPr>
+        <p:spPr>
+          <a:xfrm>
+            <a:off x="6095847" y="1981962"/>
             <a:ext cx="2804089" cy="480060"/>
           </a:xfrm>
           <a:prstGeom prst="rect">
@@ -4630,7 +4700,7 @@
           <a:p>
             <a:pPr algn="l"/>
             <a:r>
-              <a:rPr sz="750" b="0">
+              <a:rPr sz="800" b="0">
                 <a:solidFill>
                   <a:srgbClr val="1A1A1A"/>
                 </a:solidFill>
@@ -4643,13 +4713,13 @@
       </p:sp>
       <p:sp>
         <p:nvSpPr>
-          <p:cNvPr id="17" name="Rectangle 16"/>
+          <p:cNvPr id="19" name="Rectangle 18"/>
           <p:cNvSpPr/>
           <p:nvPr/>
         </p:nvSpPr>
         <p:spPr>
           <a:xfrm>
-            <a:off x="8778020" y="1268730"/>
+            <a:off x="8899937" y="1954530"/>
             <a:ext cx="2804089" cy="534924"/>
           </a:xfrm>
           <a:prstGeom prst="rect">
@@ -4689,13 +4759,13 @@
       </p:sp>
       <p:sp>
         <p:nvSpPr>
-          <p:cNvPr id="18" name="TextBox 17"/>
-          <p:cNvSpPr txBox="1"/>
-          <p:nvPr/>
-        </p:nvSpPr>
-        <p:spPr>
-          <a:xfrm>
-            <a:off x="8778020" y="1296161"/>
+          <p:cNvPr id="20" name="TextBox 19"/>
+          <p:cNvSpPr txBox="1"/>
+          <p:nvPr/>
+        </p:nvSpPr>
+        <p:spPr>
+          <a:xfrm>
+            <a:off x="8899937" y="1981962"/>
             <a:ext cx="2804089" cy="480060"/>
           </a:xfrm>
           <a:prstGeom prst="rect">
@@ -4711,7 +4781,7 @@
           <a:p>
             <a:pPr algn="l"/>
             <a:r>
-              <a:rPr sz="750" b="0">
+              <a:rPr sz="800" b="0">
                 <a:solidFill>
                   <a:srgbClr val="1A1A1A"/>
                 </a:solidFill>
@@ -4724,13 +4794,13 @@
       </p:sp>
       <p:sp>
         <p:nvSpPr>
-          <p:cNvPr id="19" name="Rectangle 18"/>
+          <p:cNvPr id="21" name="Rectangle 20"/>
           <p:cNvSpPr/>
           <p:nvPr/>
         </p:nvSpPr>
         <p:spPr>
           <a:xfrm>
-            <a:off x="365750" y="1803654"/>
+            <a:off x="487667" y="2489453"/>
             <a:ext cx="2804089" cy="411480"/>
           </a:xfrm>
           <a:prstGeom prst="rect">
@@ -4770,13 +4840,13 @@
       </p:sp>
       <p:sp>
         <p:nvSpPr>
-          <p:cNvPr id="20" name="TextBox 19"/>
-          <p:cNvSpPr txBox="1"/>
-          <p:nvPr/>
-        </p:nvSpPr>
-        <p:spPr>
-          <a:xfrm>
-            <a:off x="365750" y="1831086"/>
+          <p:cNvPr id="22" name="TextBox 21"/>
+          <p:cNvSpPr txBox="1"/>
+          <p:nvPr/>
+        </p:nvSpPr>
+        <p:spPr>
+          <a:xfrm>
+            <a:off x="487667" y="2516885"/>
             <a:ext cx="2804089" cy="356616"/>
           </a:xfrm>
           <a:prstGeom prst="rect">
@@ -4792,7 +4862,7 @@
           <a:p>
             <a:pPr algn="l"/>
             <a:r>
-              <a:rPr sz="750" b="0">
+              <a:rPr sz="800" b="0">
                 <a:solidFill>
                   <a:srgbClr val="1A1A1A"/>
                 </a:solidFill>
@@ -4805,13 +4875,13 @@
       </p:sp>
       <p:sp>
         <p:nvSpPr>
-          <p:cNvPr id="21" name="Rectangle 20"/>
+          <p:cNvPr id="23" name="Rectangle 22"/>
           <p:cNvSpPr/>
           <p:nvPr/>
         </p:nvSpPr>
         <p:spPr>
           <a:xfrm>
-            <a:off x="3169840" y="1803654"/>
+            <a:off x="3291757" y="2489453"/>
             <a:ext cx="2804089" cy="411480"/>
           </a:xfrm>
           <a:prstGeom prst="rect">
@@ -4851,13 +4921,13 @@
       </p:sp>
       <p:sp>
         <p:nvSpPr>
-          <p:cNvPr id="22" name="TextBox 21"/>
-          <p:cNvSpPr txBox="1"/>
-          <p:nvPr/>
-        </p:nvSpPr>
-        <p:spPr>
-          <a:xfrm>
-            <a:off x="3169840" y="1831086"/>
+          <p:cNvPr id="24" name="TextBox 23"/>
+          <p:cNvSpPr txBox="1"/>
+          <p:nvPr/>
+        </p:nvSpPr>
+        <p:spPr>
+          <a:xfrm>
+            <a:off x="3291757" y="2516885"/>
             <a:ext cx="2804089" cy="356616"/>
           </a:xfrm>
           <a:prstGeom prst="rect">
@@ -4873,7 +4943,7 @@
           <a:p>
             <a:pPr algn="l"/>
             <a:r>
-              <a:rPr sz="750" b="0">
+              <a:rPr sz="800" b="0">
                 <a:solidFill>
                   <a:srgbClr val="1A1A1A"/>
                 </a:solidFill>
@@ -4886,13 +4956,13 @@
       </p:sp>
       <p:sp>
         <p:nvSpPr>
-          <p:cNvPr id="23" name="Rectangle 22"/>
+          <p:cNvPr id="25" name="Rectangle 24"/>
           <p:cNvSpPr/>
           <p:nvPr/>
         </p:nvSpPr>
         <p:spPr>
           <a:xfrm>
-            <a:off x="5973930" y="1803654"/>
+            <a:off x="6095847" y="2489453"/>
             <a:ext cx="2804089" cy="411480"/>
           </a:xfrm>
           <a:prstGeom prst="rect">
@@ -4932,13 +5002,13 @@
       </p:sp>
       <p:sp>
         <p:nvSpPr>
-          <p:cNvPr id="24" name="TextBox 23"/>
-          <p:cNvSpPr txBox="1"/>
-          <p:nvPr/>
-        </p:nvSpPr>
-        <p:spPr>
-          <a:xfrm>
-            <a:off x="5973930" y="1831086"/>
+          <p:cNvPr id="26" name="TextBox 25"/>
+          <p:cNvSpPr txBox="1"/>
+          <p:nvPr/>
+        </p:nvSpPr>
+        <p:spPr>
+          <a:xfrm>
+            <a:off x="6095847" y="2516885"/>
             <a:ext cx="2804089" cy="356616"/>
           </a:xfrm>
           <a:prstGeom prst="rect">
@@ -4954,7 +5024,7 @@
           <a:p>
             <a:pPr algn="l"/>
             <a:r>
-              <a:rPr sz="750" b="0">
+              <a:rPr sz="800" b="0">
                 <a:solidFill>
                   <a:srgbClr val="1A1A1A"/>
                 </a:solidFill>
@@ -4967,13 +5037,13 @@
       </p:sp>
       <p:sp>
         <p:nvSpPr>
-          <p:cNvPr id="25" name="Rectangle 24"/>
+          <p:cNvPr id="27" name="Rectangle 26"/>
           <p:cNvSpPr/>
           <p:nvPr/>
         </p:nvSpPr>
         <p:spPr>
           <a:xfrm>
-            <a:off x="8778020" y="1803654"/>
+            <a:off x="8899937" y="2489453"/>
             <a:ext cx="2804089" cy="411480"/>
           </a:xfrm>
           <a:prstGeom prst="rect">
@@ -5013,13 +5083,13 @@
       </p:sp>
       <p:sp>
         <p:nvSpPr>
-          <p:cNvPr id="26" name="TextBox 25"/>
-          <p:cNvSpPr txBox="1"/>
-          <p:nvPr/>
-        </p:nvSpPr>
-        <p:spPr>
-          <a:xfrm>
-            <a:off x="8778020" y="1831086"/>
+          <p:cNvPr id="28" name="TextBox 27"/>
+          <p:cNvSpPr txBox="1"/>
+          <p:nvPr/>
+        </p:nvSpPr>
+        <p:spPr>
+          <a:xfrm>
+            <a:off x="8899937" y="2516885"/>
             <a:ext cx="2804089" cy="356616"/>
           </a:xfrm>
           <a:prstGeom prst="rect">
@@ -5035,7 +5105,7 @@
           <a:p>
             <a:pPr algn="l"/>
             <a:r>
-              <a:rPr sz="750" b="0">
+              <a:rPr sz="800" b="0">
                 <a:solidFill>
                   <a:srgbClr val="1A1A1A"/>
                 </a:solidFill>
@@ -5048,13 +5118,13 @@
       </p:sp>
       <p:sp>
         <p:nvSpPr>
-          <p:cNvPr id="27" name="Rectangle 26"/>
+          <p:cNvPr id="29" name="Rectangle 28"/>
           <p:cNvSpPr/>
           <p:nvPr/>
         </p:nvSpPr>
         <p:spPr>
           <a:xfrm>
-            <a:off x="365750" y="2215133"/>
+            <a:off x="487667" y="2900934"/>
             <a:ext cx="2804089" cy="534924"/>
           </a:xfrm>
           <a:prstGeom prst="rect">
@@ -5094,13 +5164,13 @@
       </p:sp>
       <p:sp>
         <p:nvSpPr>
-          <p:cNvPr id="28" name="TextBox 27"/>
-          <p:cNvSpPr txBox="1"/>
-          <p:nvPr/>
-        </p:nvSpPr>
-        <p:spPr>
-          <a:xfrm>
-            <a:off x="365750" y="2242565"/>
+          <p:cNvPr id="30" name="TextBox 29"/>
+          <p:cNvSpPr txBox="1"/>
+          <p:nvPr/>
+        </p:nvSpPr>
+        <p:spPr>
+          <a:xfrm>
+            <a:off x="487667" y="2928366"/>
             <a:ext cx="2804089" cy="480060"/>
           </a:xfrm>
           <a:prstGeom prst="rect">
@@ -5116,7 +5186,7 @@
           <a:p>
             <a:pPr algn="l"/>
             <a:r>
-              <a:rPr sz="750" b="0">
+              <a:rPr sz="800" b="0">
                 <a:solidFill>
                   <a:srgbClr val="1A1A1A"/>
                 </a:solidFill>
@@ -5129,13 +5199,13 @@
       </p:sp>
       <p:sp>
         <p:nvSpPr>
-          <p:cNvPr id="29" name="Rectangle 28"/>
+          <p:cNvPr id="31" name="Rectangle 30"/>
           <p:cNvSpPr/>
           <p:nvPr/>
         </p:nvSpPr>
         <p:spPr>
           <a:xfrm>
-            <a:off x="3169840" y="2215133"/>
+            <a:off x="3291757" y="2900934"/>
             <a:ext cx="2804089" cy="534924"/>
           </a:xfrm>
           <a:prstGeom prst="rect">
@@ -5175,13 +5245,13 @@
       </p:sp>
       <p:sp>
         <p:nvSpPr>
-          <p:cNvPr id="30" name="TextBox 29"/>
-          <p:cNvSpPr txBox="1"/>
-          <p:nvPr/>
-        </p:nvSpPr>
-        <p:spPr>
-          <a:xfrm>
-            <a:off x="3169840" y="2242565"/>
+          <p:cNvPr id="32" name="TextBox 31"/>
+          <p:cNvSpPr txBox="1"/>
+          <p:nvPr/>
+        </p:nvSpPr>
+        <p:spPr>
+          <a:xfrm>
+            <a:off x="3291757" y="2928366"/>
             <a:ext cx="2804089" cy="480060"/>
           </a:xfrm>
           <a:prstGeom prst="rect">
@@ -5197,7 +5267,7 @@
           <a:p>
             <a:pPr algn="l"/>
             <a:r>
-              <a:rPr sz="750" b="0">
+              <a:rPr sz="800" b="0">
                 <a:solidFill>
                   <a:srgbClr val="1A1A1A"/>
                 </a:solidFill>
@@ -5210,13 +5280,13 @@
       </p:sp>
       <p:sp>
         <p:nvSpPr>
-          <p:cNvPr id="31" name="Rectangle 30"/>
+          <p:cNvPr id="33" name="Rectangle 32"/>
           <p:cNvSpPr/>
           <p:nvPr/>
         </p:nvSpPr>
         <p:spPr>
           <a:xfrm>
-            <a:off x="5973930" y="2215133"/>
+            <a:off x="6095847" y="2900934"/>
             <a:ext cx="2804089" cy="534924"/>
           </a:xfrm>
           <a:prstGeom prst="rect">
@@ -5256,13 +5326,13 @@
       </p:sp>
       <p:sp>
         <p:nvSpPr>
-          <p:cNvPr id="32" name="TextBox 31"/>
-          <p:cNvSpPr txBox="1"/>
-          <p:nvPr/>
-        </p:nvSpPr>
-        <p:spPr>
-          <a:xfrm>
-            <a:off x="5973930" y="2242565"/>
+          <p:cNvPr id="34" name="TextBox 33"/>
+          <p:cNvSpPr txBox="1"/>
+          <p:nvPr/>
+        </p:nvSpPr>
+        <p:spPr>
+          <a:xfrm>
+            <a:off x="6095847" y="2928366"/>
             <a:ext cx="2804089" cy="480060"/>
           </a:xfrm>
           <a:prstGeom prst="rect">
@@ -5278,7 +5348,7 @@
           <a:p>
             <a:pPr algn="l"/>
             <a:r>
-              <a:rPr sz="750" b="0">
+              <a:rPr sz="800" b="0">
                 <a:solidFill>
                   <a:srgbClr val="1A1A1A"/>
                 </a:solidFill>
@@ -5291,13 +5361,13 @@
       </p:sp>
       <p:sp>
         <p:nvSpPr>
-          <p:cNvPr id="33" name="Rectangle 32"/>
+          <p:cNvPr id="35" name="Rectangle 34"/>
           <p:cNvSpPr/>
           <p:nvPr/>
         </p:nvSpPr>
         <p:spPr>
           <a:xfrm>
-            <a:off x="8778020" y="2215133"/>
+            <a:off x="8899937" y="2900934"/>
             <a:ext cx="2804089" cy="534924"/>
           </a:xfrm>
           <a:prstGeom prst="rect">
@@ -5337,13 +5407,13 @@
       </p:sp>
       <p:sp>
         <p:nvSpPr>
-          <p:cNvPr id="34" name="TextBox 33"/>
-          <p:cNvSpPr txBox="1"/>
-          <p:nvPr/>
-        </p:nvSpPr>
-        <p:spPr>
-          <a:xfrm>
-            <a:off x="8778020" y="2242565"/>
+          <p:cNvPr id="36" name="TextBox 35"/>
+          <p:cNvSpPr txBox="1"/>
+          <p:nvPr/>
+        </p:nvSpPr>
+        <p:spPr>
+          <a:xfrm>
+            <a:off x="8899937" y="2928366"/>
             <a:ext cx="2804089" cy="480060"/>
           </a:xfrm>
           <a:prstGeom prst="rect">
@@ -5359,7 +5429,7 @@
           <a:p>
             <a:pPr algn="l"/>
             <a:r>
-              <a:rPr sz="750" b="0">
+              <a:rPr sz="800" b="0">
                 <a:solidFill>
                   <a:srgbClr val="1A1A1A"/>
                 </a:solidFill>
@@ -5372,13 +5442,13 @@
       </p:sp>
       <p:sp>
         <p:nvSpPr>
-          <p:cNvPr id="35" name="Rectangle 34"/>
+          <p:cNvPr id="37" name="Rectangle 36"/>
           <p:cNvSpPr/>
           <p:nvPr/>
         </p:nvSpPr>
         <p:spPr>
           <a:xfrm>
-            <a:off x="365750" y="2750057"/>
+            <a:off x="487667" y="3435857"/>
             <a:ext cx="2804089" cy="534924"/>
           </a:xfrm>
           <a:prstGeom prst="rect">
@@ -5418,13 +5488,13 @@
       </p:sp>
       <p:sp>
         <p:nvSpPr>
-          <p:cNvPr id="36" name="TextBox 35"/>
-          <p:cNvSpPr txBox="1"/>
-          <p:nvPr/>
-        </p:nvSpPr>
-        <p:spPr>
-          <a:xfrm>
-            <a:off x="365750" y="2777489"/>
+          <p:cNvPr id="38" name="TextBox 37"/>
+          <p:cNvSpPr txBox="1"/>
+          <p:nvPr/>
+        </p:nvSpPr>
+        <p:spPr>
+          <a:xfrm>
+            <a:off x="487667" y="3463289"/>
             <a:ext cx="2804089" cy="480060"/>
           </a:xfrm>
           <a:prstGeom prst="rect">
@@ -5440,7 +5510,7 @@
           <a:p>
             <a:pPr algn="l"/>
             <a:r>
-              <a:rPr sz="750" b="0">
+              <a:rPr sz="800" b="0">
                 <a:solidFill>
                   <a:srgbClr val="1A1A1A"/>
                 </a:solidFill>
@@ -5453,13 +5523,13 @@
       </p:sp>
       <p:sp>
         <p:nvSpPr>
-          <p:cNvPr id="37" name="Rectangle 36"/>
+          <p:cNvPr id="39" name="Rectangle 38"/>
           <p:cNvSpPr/>
           <p:nvPr/>
         </p:nvSpPr>
         <p:spPr>
           <a:xfrm>
-            <a:off x="3169840" y="2750057"/>
+            <a:off x="3291757" y="3435857"/>
             <a:ext cx="2804089" cy="534924"/>
           </a:xfrm>
           <a:prstGeom prst="rect">
@@ -5499,13 +5569,13 @@
       </p:sp>
       <p:sp>
         <p:nvSpPr>
-          <p:cNvPr id="38" name="TextBox 37"/>
-          <p:cNvSpPr txBox="1"/>
-          <p:nvPr/>
-        </p:nvSpPr>
-        <p:spPr>
-          <a:xfrm>
-            <a:off x="3169840" y="2777489"/>
+          <p:cNvPr id="40" name="TextBox 39"/>
+          <p:cNvSpPr txBox="1"/>
+          <p:nvPr/>
+        </p:nvSpPr>
+        <p:spPr>
+          <a:xfrm>
+            <a:off x="3291757" y="3463289"/>
             <a:ext cx="2804089" cy="480060"/>
           </a:xfrm>
           <a:prstGeom prst="rect">
@@ -5521,7 +5591,7 @@
           <a:p>
             <a:pPr algn="l"/>
             <a:r>
-              <a:rPr sz="750" b="0">
+              <a:rPr sz="800" b="0">
                 <a:solidFill>
                   <a:srgbClr val="1A1A1A"/>
                 </a:solidFill>
@@ -5534,13 +5604,13 @@
       </p:sp>
       <p:sp>
         <p:nvSpPr>
-          <p:cNvPr id="39" name="Rectangle 38"/>
+          <p:cNvPr id="41" name="Rectangle 40"/>
           <p:cNvSpPr/>
           <p:nvPr/>
         </p:nvSpPr>
         <p:spPr>
           <a:xfrm>
-            <a:off x="5973930" y="2750057"/>
+            <a:off x="6095847" y="3435857"/>
             <a:ext cx="2804089" cy="534924"/>
           </a:xfrm>
           <a:prstGeom prst="rect">
@@ -5580,13 +5650,13 @@
       </p:sp>
       <p:sp>
         <p:nvSpPr>
-          <p:cNvPr id="40" name="TextBox 39"/>
-          <p:cNvSpPr txBox="1"/>
-          <p:nvPr/>
-        </p:nvSpPr>
-        <p:spPr>
-          <a:xfrm>
-            <a:off x="5973930" y="2777489"/>
+          <p:cNvPr id="42" name="TextBox 41"/>
+          <p:cNvSpPr txBox="1"/>
+          <p:nvPr/>
+        </p:nvSpPr>
+        <p:spPr>
+          <a:xfrm>
+            <a:off x="6095847" y="3463289"/>
             <a:ext cx="2804089" cy="480060"/>
           </a:xfrm>
           <a:prstGeom prst="rect">
@@ -5602,7 +5672,7 @@
           <a:p>
             <a:pPr algn="l"/>
             <a:r>
-              <a:rPr sz="750" b="0">
+              <a:rPr sz="800" b="0">
                 <a:solidFill>
                   <a:srgbClr val="1A1A1A"/>
                 </a:solidFill>
@@ -5615,13 +5685,13 @@
       </p:sp>
       <p:sp>
         <p:nvSpPr>
-          <p:cNvPr id="41" name="Rectangle 40"/>
+          <p:cNvPr id="43" name="Rectangle 42"/>
           <p:cNvSpPr/>
           <p:nvPr/>
         </p:nvSpPr>
         <p:spPr>
           <a:xfrm>
-            <a:off x="8778020" y="2750057"/>
+            <a:off x="8899937" y="3435857"/>
             <a:ext cx="2804089" cy="534924"/>
           </a:xfrm>
           <a:prstGeom prst="rect">
@@ -5661,13 +5731,13 @@
       </p:sp>
       <p:sp>
         <p:nvSpPr>
-          <p:cNvPr id="42" name="TextBox 41"/>
-          <p:cNvSpPr txBox="1"/>
-          <p:nvPr/>
-        </p:nvSpPr>
-        <p:spPr>
-          <a:xfrm>
-            <a:off x="8778020" y="2777489"/>
+          <p:cNvPr id="44" name="TextBox 43"/>
+          <p:cNvSpPr txBox="1"/>
+          <p:nvPr/>
+        </p:nvSpPr>
+        <p:spPr>
+          <a:xfrm>
+            <a:off x="8899937" y="3463289"/>
             <a:ext cx="2804089" cy="480060"/>
           </a:xfrm>
           <a:prstGeom prst="rect">
@@ -5683,7 +5753,7 @@
           <a:p>
             <a:pPr algn="l"/>
             <a:r>
-              <a:rPr sz="750" b="0">
+              <a:rPr sz="800" b="0">
                 <a:solidFill>
                   <a:srgbClr val="1A1A1A"/>
                 </a:solidFill>
@@ -5696,7 +5766,7 @@
       </p:sp>
       <p:sp>
         <p:nvSpPr>
-          <p:cNvPr id="43" name="TextBox 42"/>
+          <p:cNvPr id="45" name="TextBox 44"/>
           <p:cNvSpPr txBox="1"/>
           <p:nvPr/>
         </p:nvSpPr>
@@ -5731,7 +5801,7 @@
       </p:sp>
       <p:sp>
         <p:nvSpPr>
-          <p:cNvPr id="44" name="TextBox 43"/>
+          <p:cNvPr id="46" name="TextBox 45"/>
           <p:cNvSpPr txBox="1"/>
           <p:nvPr/>
         </p:nvSpPr>
@@ -5790,42 +5860,77 @@
         </p:nvSpPr>
         <p:spPr>
           <a:xfrm>
-            <a:off x="365750" y="274320"/>
-            <a:ext cx="10972525" cy="480060"/>
-          </a:xfrm>
-          <a:prstGeom prst="rect">
-            <a:avLst/>
-          </a:prstGeom>
-          <a:noFill/>
-        </p:spPr>
-        <p:txBody>
-          <a:bodyPr wrap="square" lIns="36000" rIns="36000" tIns="18000" bIns="18000">
-            <a:spAutoFit/>
-          </a:bodyPr>
-          <a:lstStyle/>
-          <a:p>
-            <a:pPr algn="l"/>
-            <a:r>
-              <a:rPr sz="1700" b="1">
+            <a:off x="487667" y="137160"/>
+            <a:ext cx="7315017" cy="274320"/>
+          </a:xfrm>
+          <a:prstGeom prst="rect">
+            <a:avLst/>
+          </a:prstGeom>
+          <a:noFill/>
+        </p:spPr>
+        <p:txBody>
+          <a:bodyPr wrap="square" lIns="36000" rIns="36000" tIns="18000" bIns="18000">
+            <a:spAutoFit/>
+          </a:bodyPr>
+          <a:lstStyle/>
+          <a:p>
+            <a:pPr algn="l"/>
+            <a:r>
+              <a:rPr sz="900" b="0">
+                <a:solidFill>
+                  <a:srgbClr val="767676"/>
+                </a:solidFill>
+                <a:latin typeface="Pretendard"/>
+              </a:rPr>
+              <a:t>디자인 시안전략</a:t>
+            </a:r>
+          </a:p>
+        </p:txBody>
+      </p:sp>
+      <p:sp>
+        <p:nvSpPr>
+          <p:cNvPr id="3" name="TextBox 2"/>
+          <p:cNvSpPr txBox="1"/>
+          <p:nvPr/>
+        </p:nvSpPr>
+        <p:spPr>
+          <a:xfrm>
+            <a:off x="487667" y="548640"/>
+            <a:ext cx="11216359" cy="548640"/>
+          </a:xfrm>
+          <a:prstGeom prst="rect">
+            <a:avLst/>
+          </a:prstGeom>
+          <a:noFill/>
+        </p:spPr>
+        <p:txBody>
+          <a:bodyPr wrap="square" lIns="36000" rIns="36000" tIns="18000" bIns="18000">
+            <a:spAutoFit/>
+          </a:bodyPr>
+          <a:lstStyle/>
+          <a:p>
+            <a:pPr algn="l"/>
+            <a:r>
+              <a:rPr sz="2400" b="1">
                 <a:solidFill>
                   <a:srgbClr val="1A1A1A"/>
                 </a:solidFill>
                 <a:latin typeface="Pretendard"/>
               </a:rPr>
-              <a:t>2. 컨셉이 이미 시각 제약을 담고 있다</a:t>
-            </a:r>
-          </a:p>
-        </p:txBody>
-      </p:sp>
-      <p:sp>
-        <p:nvSpPr>
-          <p:cNvPr id="3" name="Rectangle 2"/>
+              <a:t>컨셉이 이미 시각 제약을 담고 있다</a:t>
+            </a:r>
+          </a:p>
+        </p:txBody>
+      </p:sp>
+      <p:sp>
+        <p:nvSpPr>
+          <p:cNvPr id="4" name="Rectangle 3"/>
           <p:cNvSpPr/>
           <p:nvPr/>
         </p:nvSpPr>
         <p:spPr>
           <a:xfrm>
-            <a:off x="365750" y="891540"/>
+            <a:off x="487667" y="1234440"/>
             <a:ext cx="3169840" cy="377190"/>
           </a:xfrm>
           <a:prstGeom prst="rect">
@@ -5865,13 +5970,13 @@
       </p:sp>
       <p:sp>
         <p:nvSpPr>
-          <p:cNvPr id="4" name="TextBox 3"/>
-          <p:cNvSpPr txBox="1"/>
-          <p:nvPr/>
-        </p:nvSpPr>
-        <p:spPr>
-          <a:xfrm>
-            <a:off x="365750" y="946404"/>
+          <p:cNvPr id="5" name="TextBox 4"/>
+          <p:cNvSpPr txBox="1"/>
+          <p:nvPr/>
+        </p:nvSpPr>
+        <p:spPr>
+          <a:xfrm>
+            <a:off x="487667" y="1289304"/>
             <a:ext cx="3169840" cy="301752"/>
           </a:xfrm>
           <a:prstGeom prst="rect">
@@ -5900,13 +6005,13 @@
       </p:sp>
       <p:sp>
         <p:nvSpPr>
-          <p:cNvPr id="5" name="Rectangle 4"/>
+          <p:cNvPr id="6" name="Rectangle 5"/>
           <p:cNvSpPr/>
           <p:nvPr/>
         </p:nvSpPr>
         <p:spPr>
           <a:xfrm>
-            <a:off x="3535591" y="891540"/>
+            <a:off x="3657508" y="1234440"/>
             <a:ext cx="4145176" cy="377190"/>
           </a:xfrm>
           <a:prstGeom prst="rect">
@@ -5946,13 +6051,13 @@
       </p:sp>
       <p:sp>
         <p:nvSpPr>
-          <p:cNvPr id="6" name="TextBox 5"/>
-          <p:cNvSpPr txBox="1"/>
-          <p:nvPr/>
-        </p:nvSpPr>
-        <p:spPr>
-          <a:xfrm>
-            <a:off x="3535591" y="946404"/>
+          <p:cNvPr id="7" name="TextBox 6"/>
+          <p:cNvSpPr txBox="1"/>
+          <p:nvPr/>
+        </p:nvSpPr>
+        <p:spPr>
+          <a:xfrm>
+            <a:off x="3657508" y="1289304"/>
             <a:ext cx="4145176" cy="301752"/>
           </a:xfrm>
           <a:prstGeom prst="rect">
@@ -5981,13 +6086,13 @@
       </p:sp>
       <p:sp>
         <p:nvSpPr>
-          <p:cNvPr id="7" name="Rectangle 6"/>
+          <p:cNvPr id="8" name="Rectangle 7"/>
           <p:cNvSpPr/>
           <p:nvPr/>
         </p:nvSpPr>
         <p:spPr>
           <a:xfrm>
-            <a:off x="7680767" y="891540"/>
+            <a:off x="7802684" y="1234440"/>
             <a:ext cx="4145176" cy="377190"/>
           </a:xfrm>
           <a:prstGeom prst="rect">
@@ -6027,13 +6132,13 @@
       </p:sp>
       <p:sp>
         <p:nvSpPr>
-          <p:cNvPr id="8" name="TextBox 7"/>
-          <p:cNvSpPr txBox="1"/>
-          <p:nvPr/>
-        </p:nvSpPr>
-        <p:spPr>
-          <a:xfrm>
-            <a:off x="7680767" y="946404"/>
+          <p:cNvPr id="9" name="TextBox 8"/>
+          <p:cNvSpPr txBox="1"/>
+          <p:nvPr/>
+        </p:nvSpPr>
+        <p:spPr>
+          <a:xfrm>
+            <a:off x="7802684" y="1289304"/>
             <a:ext cx="4145176" cy="301752"/>
           </a:xfrm>
           <a:prstGeom prst="rect">
@@ -6062,13 +6167,13 @@
       </p:sp>
       <p:sp>
         <p:nvSpPr>
-          <p:cNvPr id="9" name="Rectangle 8"/>
+          <p:cNvPr id="10" name="Rectangle 9"/>
           <p:cNvSpPr/>
           <p:nvPr/>
         </p:nvSpPr>
         <p:spPr>
           <a:xfrm>
-            <a:off x="365750" y="1268730"/>
+            <a:off x="487667" y="1611630"/>
             <a:ext cx="3169840" cy="534924"/>
           </a:xfrm>
           <a:prstGeom prst="rect">
@@ -6108,13 +6213,13 @@
       </p:sp>
       <p:sp>
         <p:nvSpPr>
-          <p:cNvPr id="10" name="TextBox 9"/>
-          <p:cNvSpPr txBox="1"/>
-          <p:nvPr/>
-        </p:nvSpPr>
-        <p:spPr>
-          <a:xfrm>
-            <a:off x="365750" y="1296161"/>
+          <p:cNvPr id="11" name="TextBox 10"/>
+          <p:cNvSpPr txBox="1"/>
+          <p:nvPr/>
+        </p:nvSpPr>
+        <p:spPr>
+          <a:xfrm>
+            <a:off x="487667" y="1639062"/>
             <a:ext cx="3169840" cy="480060"/>
           </a:xfrm>
           <a:prstGeom prst="rect">
@@ -6130,7 +6235,7 @@
           <a:p>
             <a:pPr algn="l"/>
             <a:r>
-              <a:rPr sz="750" b="0">
+              <a:rPr sz="800" b="0">
                 <a:solidFill>
                   <a:srgbClr val="1A1A1A"/>
                 </a:solidFill>
@@ -6143,13 +6248,13 @@
       </p:sp>
       <p:sp>
         <p:nvSpPr>
-          <p:cNvPr id="11" name="Rectangle 10"/>
+          <p:cNvPr id="12" name="Rectangle 11"/>
           <p:cNvSpPr/>
           <p:nvPr/>
         </p:nvSpPr>
         <p:spPr>
           <a:xfrm>
-            <a:off x="3535591" y="1268730"/>
+            <a:off x="3657508" y="1611630"/>
             <a:ext cx="4145176" cy="534924"/>
           </a:xfrm>
           <a:prstGeom prst="rect">
@@ -6189,13 +6294,13 @@
       </p:sp>
       <p:sp>
         <p:nvSpPr>
-          <p:cNvPr id="12" name="TextBox 11"/>
-          <p:cNvSpPr txBox="1"/>
-          <p:nvPr/>
-        </p:nvSpPr>
-        <p:spPr>
-          <a:xfrm>
-            <a:off x="3535591" y="1296161"/>
+          <p:cNvPr id="13" name="TextBox 12"/>
+          <p:cNvSpPr txBox="1"/>
+          <p:nvPr/>
+        </p:nvSpPr>
+        <p:spPr>
+          <a:xfrm>
+            <a:off x="3657508" y="1639062"/>
             <a:ext cx="4145176" cy="480060"/>
           </a:xfrm>
           <a:prstGeom prst="rect">
@@ -6211,7 +6316,7 @@
           <a:p>
             <a:pPr algn="l"/>
             <a:r>
-              <a:rPr sz="750" b="0">
+              <a:rPr sz="800" b="0">
                 <a:solidFill>
                   <a:srgbClr val="1A1A1A"/>
                 </a:solidFill>
@@ -6224,13 +6329,13 @@
       </p:sp>
       <p:sp>
         <p:nvSpPr>
-          <p:cNvPr id="13" name="Rectangle 12"/>
+          <p:cNvPr id="14" name="Rectangle 13"/>
           <p:cNvSpPr/>
           <p:nvPr/>
         </p:nvSpPr>
         <p:spPr>
           <a:xfrm>
-            <a:off x="7680767" y="1268730"/>
+            <a:off x="7802684" y="1611630"/>
             <a:ext cx="4145176" cy="534924"/>
           </a:xfrm>
           <a:prstGeom prst="rect">
@@ -6270,13 +6375,13 @@
       </p:sp>
       <p:sp>
         <p:nvSpPr>
-          <p:cNvPr id="14" name="TextBox 13"/>
-          <p:cNvSpPr txBox="1"/>
-          <p:nvPr/>
-        </p:nvSpPr>
-        <p:spPr>
-          <a:xfrm>
-            <a:off x="7680767" y="1296161"/>
+          <p:cNvPr id="15" name="TextBox 14"/>
+          <p:cNvSpPr txBox="1"/>
+          <p:nvPr/>
+        </p:nvSpPr>
+        <p:spPr>
+          <a:xfrm>
+            <a:off x="7802684" y="1639062"/>
             <a:ext cx="4145176" cy="480060"/>
           </a:xfrm>
           <a:prstGeom prst="rect">
@@ -6292,7 +6397,7 @@
           <a:p>
             <a:pPr algn="l"/>
             <a:r>
-              <a:rPr sz="750" b="0">
+              <a:rPr sz="800" b="0">
                 <a:solidFill>
                   <a:srgbClr val="1A1A1A"/>
                 </a:solidFill>
@@ -6305,13 +6410,13 @@
       </p:sp>
       <p:sp>
         <p:nvSpPr>
-          <p:cNvPr id="15" name="Rectangle 14"/>
+          <p:cNvPr id="16" name="Rectangle 15"/>
           <p:cNvSpPr/>
           <p:nvPr/>
         </p:nvSpPr>
         <p:spPr>
           <a:xfrm>
-            <a:off x="365750" y="1803654"/>
+            <a:off x="487667" y="2146554"/>
             <a:ext cx="3169840" cy="534924"/>
           </a:xfrm>
           <a:prstGeom prst="rect">
@@ -6351,13 +6456,13 @@
       </p:sp>
       <p:sp>
         <p:nvSpPr>
-          <p:cNvPr id="16" name="TextBox 15"/>
-          <p:cNvSpPr txBox="1"/>
-          <p:nvPr/>
-        </p:nvSpPr>
-        <p:spPr>
-          <a:xfrm>
-            <a:off x="365750" y="1831086"/>
+          <p:cNvPr id="17" name="TextBox 16"/>
+          <p:cNvSpPr txBox="1"/>
+          <p:nvPr/>
+        </p:nvSpPr>
+        <p:spPr>
+          <a:xfrm>
+            <a:off x="487667" y="2173986"/>
             <a:ext cx="3169840" cy="480060"/>
           </a:xfrm>
           <a:prstGeom prst="rect">
@@ -6373,7 +6478,7 @@
           <a:p>
             <a:pPr algn="l"/>
             <a:r>
-              <a:rPr sz="750" b="0">
+              <a:rPr sz="800" b="0">
                 <a:solidFill>
                   <a:srgbClr val="1A1A1A"/>
                 </a:solidFill>
@@ -6386,13 +6491,13 @@
       </p:sp>
       <p:sp>
         <p:nvSpPr>
-          <p:cNvPr id="17" name="Rectangle 16"/>
+          <p:cNvPr id="18" name="Rectangle 17"/>
           <p:cNvSpPr/>
           <p:nvPr/>
         </p:nvSpPr>
         <p:spPr>
           <a:xfrm>
-            <a:off x="3535591" y="1803654"/>
+            <a:off x="3657508" y="2146554"/>
             <a:ext cx="4145176" cy="534924"/>
           </a:xfrm>
           <a:prstGeom prst="rect">
@@ -6432,13 +6537,13 @@
       </p:sp>
       <p:sp>
         <p:nvSpPr>
-          <p:cNvPr id="18" name="TextBox 17"/>
-          <p:cNvSpPr txBox="1"/>
-          <p:nvPr/>
-        </p:nvSpPr>
-        <p:spPr>
-          <a:xfrm>
-            <a:off x="3535591" y="1831086"/>
+          <p:cNvPr id="19" name="TextBox 18"/>
+          <p:cNvSpPr txBox="1"/>
+          <p:nvPr/>
+        </p:nvSpPr>
+        <p:spPr>
+          <a:xfrm>
+            <a:off x="3657508" y="2173986"/>
             <a:ext cx="4145176" cy="480060"/>
           </a:xfrm>
           <a:prstGeom prst="rect">
@@ -6454,7 +6559,7 @@
           <a:p>
             <a:pPr algn="l"/>
             <a:r>
-              <a:rPr sz="750" b="0">
+              <a:rPr sz="800" b="0">
                 <a:solidFill>
                   <a:srgbClr val="1A1A1A"/>
                 </a:solidFill>
@@ -6467,13 +6572,13 @@
       </p:sp>
       <p:sp>
         <p:nvSpPr>
-          <p:cNvPr id="19" name="Rectangle 18"/>
+          <p:cNvPr id="20" name="Rectangle 19"/>
           <p:cNvSpPr/>
           <p:nvPr/>
         </p:nvSpPr>
         <p:spPr>
           <a:xfrm>
-            <a:off x="7680767" y="1803654"/>
+            <a:off x="7802684" y="2146554"/>
             <a:ext cx="4145176" cy="534924"/>
           </a:xfrm>
           <a:prstGeom prst="rect">
@@ -6513,13 +6618,13 @@
       </p:sp>
       <p:sp>
         <p:nvSpPr>
-          <p:cNvPr id="20" name="TextBox 19"/>
-          <p:cNvSpPr txBox="1"/>
-          <p:nvPr/>
-        </p:nvSpPr>
-        <p:spPr>
-          <a:xfrm>
-            <a:off x="7680767" y="1831086"/>
+          <p:cNvPr id="21" name="TextBox 20"/>
+          <p:cNvSpPr txBox="1"/>
+          <p:nvPr/>
+        </p:nvSpPr>
+        <p:spPr>
+          <a:xfrm>
+            <a:off x="7802684" y="2173986"/>
             <a:ext cx="4145176" cy="480060"/>
           </a:xfrm>
           <a:prstGeom prst="rect">
@@ -6535,7 +6640,7 @@
           <a:p>
             <a:pPr algn="l"/>
             <a:r>
-              <a:rPr sz="750" b="0">
+              <a:rPr sz="800" b="0">
                 <a:solidFill>
                   <a:srgbClr val="1A1A1A"/>
                 </a:solidFill>
@@ -6548,13 +6653,13 @@
       </p:sp>
       <p:sp>
         <p:nvSpPr>
-          <p:cNvPr id="21" name="Rectangle 20"/>
+          <p:cNvPr id="22" name="Rectangle 21"/>
           <p:cNvSpPr/>
           <p:nvPr/>
         </p:nvSpPr>
         <p:spPr>
           <a:xfrm>
-            <a:off x="365750" y="2338578"/>
+            <a:off x="487667" y="2681478"/>
             <a:ext cx="3169840" cy="534924"/>
           </a:xfrm>
           <a:prstGeom prst="rect">
@@ -6594,13 +6699,13 @@
       </p:sp>
       <p:sp>
         <p:nvSpPr>
-          <p:cNvPr id="22" name="TextBox 21"/>
-          <p:cNvSpPr txBox="1"/>
-          <p:nvPr/>
-        </p:nvSpPr>
-        <p:spPr>
-          <a:xfrm>
-            <a:off x="365750" y="2366010"/>
+          <p:cNvPr id="23" name="TextBox 22"/>
+          <p:cNvSpPr txBox="1"/>
+          <p:nvPr/>
+        </p:nvSpPr>
+        <p:spPr>
+          <a:xfrm>
+            <a:off x="487667" y="2708910"/>
             <a:ext cx="3169840" cy="480060"/>
           </a:xfrm>
           <a:prstGeom prst="rect">
@@ -6616,7 +6721,7 @@
           <a:p>
             <a:pPr algn="l"/>
             <a:r>
-              <a:rPr sz="750" b="0">
+              <a:rPr sz="800" b="0">
                 <a:solidFill>
                   <a:srgbClr val="1A1A1A"/>
                 </a:solidFill>
@@ -6629,13 +6734,13 @@
       </p:sp>
       <p:sp>
         <p:nvSpPr>
-          <p:cNvPr id="23" name="Rectangle 22"/>
+          <p:cNvPr id="24" name="Rectangle 23"/>
           <p:cNvSpPr/>
           <p:nvPr/>
         </p:nvSpPr>
         <p:spPr>
           <a:xfrm>
-            <a:off x="3535591" y="2338578"/>
+            <a:off x="3657508" y="2681478"/>
             <a:ext cx="4145176" cy="534924"/>
           </a:xfrm>
           <a:prstGeom prst="rect">
@@ -6675,13 +6780,13 @@
       </p:sp>
       <p:sp>
         <p:nvSpPr>
-          <p:cNvPr id="24" name="TextBox 23"/>
-          <p:cNvSpPr txBox="1"/>
-          <p:nvPr/>
-        </p:nvSpPr>
-        <p:spPr>
-          <a:xfrm>
-            <a:off x="3535591" y="2366010"/>
+          <p:cNvPr id="25" name="TextBox 24"/>
+          <p:cNvSpPr txBox="1"/>
+          <p:nvPr/>
+        </p:nvSpPr>
+        <p:spPr>
+          <a:xfrm>
+            <a:off x="3657508" y="2708910"/>
             <a:ext cx="4145176" cy="480060"/>
           </a:xfrm>
           <a:prstGeom prst="rect">
@@ -6697,7 +6802,7 @@
           <a:p>
             <a:pPr algn="l"/>
             <a:r>
-              <a:rPr sz="750" b="0">
+              <a:rPr sz="800" b="0">
                 <a:solidFill>
                   <a:srgbClr val="1A1A1A"/>
                 </a:solidFill>
@@ -6710,13 +6815,13 @@
       </p:sp>
       <p:sp>
         <p:nvSpPr>
-          <p:cNvPr id="25" name="Rectangle 24"/>
+          <p:cNvPr id="26" name="Rectangle 25"/>
           <p:cNvSpPr/>
           <p:nvPr/>
         </p:nvSpPr>
         <p:spPr>
           <a:xfrm>
-            <a:off x="7680767" y="2338578"/>
+            <a:off x="7802684" y="2681478"/>
             <a:ext cx="4145176" cy="534924"/>
           </a:xfrm>
           <a:prstGeom prst="rect">
@@ -6756,13 +6861,13 @@
       </p:sp>
       <p:sp>
         <p:nvSpPr>
-          <p:cNvPr id="26" name="TextBox 25"/>
-          <p:cNvSpPr txBox="1"/>
-          <p:nvPr/>
-        </p:nvSpPr>
-        <p:spPr>
-          <a:xfrm>
-            <a:off x="7680767" y="2366010"/>
+          <p:cNvPr id="27" name="TextBox 26"/>
+          <p:cNvSpPr txBox="1"/>
+          <p:nvPr/>
+        </p:nvSpPr>
+        <p:spPr>
+          <a:xfrm>
+            <a:off x="7802684" y="2708910"/>
             <a:ext cx="4145176" cy="480060"/>
           </a:xfrm>
           <a:prstGeom prst="rect">
@@ -6778,7 +6883,7 @@
           <a:p>
             <a:pPr algn="l"/>
             <a:r>
-              <a:rPr sz="750" b="0">
+              <a:rPr sz="800" b="0">
                 <a:solidFill>
                   <a:srgbClr val="1A1A1A"/>
                 </a:solidFill>
@@ -6791,13 +6896,13 @@
       </p:sp>
       <p:sp>
         <p:nvSpPr>
-          <p:cNvPr id="27" name="Rectangle 26"/>
+          <p:cNvPr id="28" name="Rectangle 27"/>
           <p:cNvSpPr/>
           <p:nvPr/>
         </p:nvSpPr>
         <p:spPr>
           <a:xfrm>
-            <a:off x="365750" y="2873502"/>
+            <a:off x="487667" y="3216402"/>
             <a:ext cx="3169840" cy="411480"/>
           </a:xfrm>
           <a:prstGeom prst="rect">
@@ -6837,13 +6942,13 @@
       </p:sp>
       <p:sp>
         <p:nvSpPr>
-          <p:cNvPr id="28" name="TextBox 27"/>
-          <p:cNvSpPr txBox="1"/>
-          <p:nvPr/>
-        </p:nvSpPr>
-        <p:spPr>
-          <a:xfrm>
-            <a:off x="365750" y="2900934"/>
+          <p:cNvPr id="29" name="TextBox 28"/>
+          <p:cNvSpPr txBox="1"/>
+          <p:nvPr/>
+        </p:nvSpPr>
+        <p:spPr>
+          <a:xfrm>
+            <a:off x="487667" y="3243834"/>
             <a:ext cx="3169840" cy="356616"/>
           </a:xfrm>
           <a:prstGeom prst="rect">
@@ -6859,7 +6964,7 @@
           <a:p>
             <a:pPr algn="l"/>
             <a:r>
-              <a:rPr sz="750" b="0">
+              <a:rPr sz="800" b="0">
                 <a:solidFill>
                   <a:srgbClr val="1A1A1A"/>
                 </a:solidFill>
@@ -6872,13 +6977,13 @@
       </p:sp>
       <p:sp>
         <p:nvSpPr>
-          <p:cNvPr id="29" name="Rectangle 28"/>
+          <p:cNvPr id="30" name="Rectangle 29"/>
           <p:cNvSpPr/>
           <p:nvPr/>
         </p:nvSpPr>
         <p:spPr>
           <a:xfrm>
-            <a:off x="3535591" y="2873502"/>
+            <a:off x="3657508" y="3216402"/>
             <a:ext cx="4145176" cy="411480"/>
           </a:xfrm>
           <a:prstGeom prst="rect">
@@ -6918,13 +7023,13 @@
       </p:sp>
       <p:sp>
         <p:nvSpPr>
-          <p:cNvPr id="30" name="TextBox 29"/>
-          <p:cNvSpPr txBox="1"/>
-          <p:nvPr/>
-        </p:nvSpPr>
-        <p:spPr>
-          <a:xfrm>
-            <a:off x="3535591" y="2900934"/>
+          <p:cNvPr id="31" name="TextBox 30"/>
+          <p:cNvSpPr txBox="1"/>
+          <p:nvPr/>
+        </p:nvSpPr>
+        <p:spPr>
+          <a:xfrm>
+            <a:off x="3657508" y="3243834"/>
             <a:ext cx="4145176" cy="356616"/>
           </a:xfrm>
           <a:prstGeom prst="rect">
@@ -6940,7 +7045,7 @@
           <a:p>
             <a:pPr algn="l"/>
             <a:r>
-              <a:rPr sz="750" b="0">
+              <a:rPr sz="800" b="0">
                 <a:solidFill>
                   <a:srgbClr val="1A1A1A"/>
                 </a:solidFill>
@@ -6953,13 +7058,13 @@
       </p:sp>
       <p:sp>
         <p:nvSpPr>
-          <p:cNvPr id="31" name="Rectangle 30"/>
+          <p:cNvPr id="32" name="Rectangle 31"/>
           <p:cNvSpPr/>
           <p:nvPr/>
         </p:nvSpPr>
         <p:spPr>
           <a:xfrm>
-            <a:off x="7680767" y="2873502"/>
+            <a:off x="7802684" y="3216402"/>
             <a:ext cx="4145176" cy="411480"/>
           </a:xfrm>
           <a:prstGeom prst="rect">
@@ -6999,13 +7104,13 @@
       </p:sp>
       <p:sp>
         <p:nvSpPr>
-          <p:cNvPr id="32" name="TextBox 31"/>
-          <p:cNvSpPr txBox="1"/>
-          <p:nvPr/>
-        </p:nvSpPr>
-        <p:spPr>
-          <a:xfrm>
-            <a:off x="7680767" y="2900934"/>
+          <p:cNvPr id="33" name="TextBox 32"/>
+          <p:cNvSpPr txBox="1"/>
+          <p:nvPr/>
+        </p:nvSpPr>
+        <p:spPr>
+          <a:xfrm>
+            <a:off x="7802684" y="3243834"/>
             <a:ext cx="4145176" cy="356616"/>
           </a:xfrm>
           <a:prstGeom prst="rect">
@@ -7021,7 +7126,7 @@
           <a:p>
             <a:pPr algn="l"/>
             <a:r>
-              <a:rPr sz="750" b="0">
+              <a:rPr sz="800" b="0">
                 <a:solidFill>
                   <a:srgbClr val="1A1A1A"/>
                 </a:solidFill>
@@ -7034,7 +7139,7 @@
       </p:sp>
       <p:sp>
         <p:nvSpPr>
-          <p:cNvPr id="33" name="TextBox 32"/>
+          <p:cNvPr id="34" name="TextBox 33"/>
           <p:cNvSpPr txBox="1"/>
           <p:nvPr/>
         </p:nvSpPr>
@@ -7069,7 +7174,7 @@
       </p:sp>
       <p:sp>
         <p:nvSpPr>
-          <p:cNvPr id="34" name="TextBox 33"/>
+          <p:cNvPr id="35" name="TextBox 34"/>
           <p:cNvSpPr txBox="1"/>
           <p:nvPr/>
         </p:nvSpPr>
@@ -7128,58 +7233,128 @@
         </p:nvSpPr>
         <p:spPr>
           <a:xfrm>
-            <a:off x="365750" y="274320"/>
-            <a:ext cx="10972525" cy="480060"/>
-          </a:xfrm>
-          <a:prstGeom prst="rect">
-            <a:avLst/>
-          </a:prstGeom>
-          <a:noFill/>
-        </p:spPr>
-        <p:txBody>
-          <a:bodyPr wrap="square" lIns="36000" rIns="36000" tIns="18000" bIns="18000">
-            <a:spAutoFit/>
-          </a:bodyPr>
-          <a:lstStyle/>
-          <a:p>
-            <a:pPr algn="l"/>
-            <a:r>
-              <a:rPr sz="1700" b="1">
+            <a:off x="487667" y="137160"/>
+            <a:ext cx="7315017" cy="274320"/>
+          </a:xfrm>
+          <a:prstGeom prst="rect">
+            <a:avLst/>
+          </a:prstGeom>
+          <a:noFill/>
+        </p:spPr>
+        <p:txBody>
+          <a:bodyPr wrap="square" lIns="36000" rIns="36000" tIns="18000" bIns="18000">
+            <a:spAutoFit/>
+          </a:bodyPr>
+          <a:lstStyle/>
+          <a:p>
+            <a:pPr algn="l"/>
+            <a:r>
+              <a:rPr sz="900" b="0">
+                <a:solidFill>
+                  <a:srgbClr val="767676"/>
+                </a:solidFill>
+                <a:latin typeface="Pretendard"/>
+              </a:rPr>
+              <a:t>디자인 시안전략</a:t>
+            </a:r>
+          </a:p>
+        </p:txBody>
+      </p:sp>
+      <p:sp>
+        <p:nvSpPr>
+          <p:cNvPr id="3" name="TextBox 2"/>
+          <p:cNvSpPr txBox="1"/>
+          <p:nvPr/>
+        </p:nvSpPr>
+        <p:spPr>
+          <a:xfrm>
+            <a:off x="487667" y="548640"/>
+            <a:ext cx="11216359" cy="548640"/>
+          </a:xfrm>
+          <a:prstGeom prst="rect">
+            <a:avLst/>
+          </a:prstGeom>
+          <a:noFill/>
+        </p:spPr>
+        <p:txBody>
+          <a:bodyPr wrap="square" lIns="36000" rIns="36000" tIns="18000" bIns="18000">
+            <a:spAutoFit/>
+          </a:bodyPr>
+          <a:lstStyle/>
+          <a:p>
+            <a:pPr algn="l"/>
+            <a:r>
+              <a:rPr sz="2400" b="1">
                 <a:solidFill>
                   <a:srgbClr val="1A1A1A"/>
                 </a:solidFill>
                 <a:latin typeface="Pretendard"/>
               </a:rPr>
-              <a:t>3. 전체 방향 — 한 문단</a:t>
-            </a:r>
-          </a:p>
-        </p:txBody>
-      </p:sp>
-      <p:sp>
-        <p:nvSpPr>
-          <p:cNvPr id="3" name="TextBox 2"/>
-          <p:cNvSpPr txBox="1"/>
-          <p:nvPr/>
-        </p:nvSpPr>
-        <p:spPr>
-          <a:xfrm>
-            <a:off x="365750" y="891540"/>
-            <a:ext cx="10972525" cy="5349240"/>
-          </a:xfrm>
-          <a:prstGeom prst="rect">
-            <a:avLst/>
-          </a:prstGeom>
-          <a:noFill/>
-        </p:spPr>
-        <p:txBody>
-          <a:bodyPr wrap="square" lIns="36000" rIns="36000" tIns="18000" bIns="18000">
-            <a:spAutoFit/>
-          </a:bodyPr>
-          <a:lstStyle/>
-          <a:p>
-            <a:pPr algn="l"/>
-            <a:r>
-              <a:rPr sz="1100" b="0">
+              <a:t>전체 방향</a:t>
+            </a:r>
+          </a:p>
+        </p:txBody>
+      </p:sp>
+      <p:sp>
+        <p:nvSpPr>
+          <p:cNvPr id="4" name="TextBox 3"/>
+          <p:cNvSpPr txBox="1"/>
+          <p:nvPr/>
+        </p:nvSpPr>
+        <p:spPr>
+          <a:xfrm>
+            <a:off x="487667" y="1097280"/>
+            <a:ext cx="11216359" cy="377190"/>
+          </a:xfrm>
+          <a:prstGeom prst="rect">
+            <a:avLst/>
+          </a:prstGeom>
+          <a:noFill/>
+        </p:spPr>
+        <p:txBody>
+          <a:bodyPr wrap="square" lIns="36000" rIns="36000" tIns="18000" bIns="18000">
+            <a:spAutoFit/>
+          </a:bodyPr>
+          <a:lstStyle/>
+          <a:p>
+            <a:pPr algn="l"/>
+            <a:r>
+              <a:rPr sz="1200" b="0">
+                <a:solidFill>
+                  <a:srgbClr val="767676"/>
+                </a:solidFill>
+                <a:latin typeface="Pretendard"/>
+              </a:rPr>
+              <a:t>한 문단</a:t>
+            </a:r>
+          </a:p>
+        </p:txBody>
+      </p:sp>
+      <p:sp>
+        <p:nvSpPr>
+          <p:cNvPr id="5" name="TextBox 4"/>
+          <p:cNvSpPr txBox="1"/>
+          <p:nvPr/>
+        </p:nvSpPr>
+        <p:spPr>
+          <a:xfrm>
+            <a:off x="487667" y="1577340"/>
+            <a:ext cx="11216359" cy="4732020"/>
+          </a:xfrm>
+          <a:prstGeom prst="rect">
+            <a:avLst/>
+          </a:prstGeom>
+          <a:noFill/>
+        </p:spPr>
+        <p:txBody>
+          <a:bodyPr wrap="square" lIns="36000" rIns="36000" tIns="18000" bIns="18000">
+            <a:spAutoFit/>
+          </a:bodyPr>
+          <a:lstStyle/>
+          <a:p>
+            <a:pPr algn="l"/>
+            <a:r>
+              <a:rPr sz="1150" b="0">
                 <a:solidFill>
                   <a:srgbClr val="1A1A1A"/>
                 </a:solidFill>
@@ -7192,7 +7367,7 @@
       </p:sp>
       <p:sp>
         <p:nvSpPr>
-          <p:cNvPr id="4" name="TextBox 3"/>
+          <p:cNvPr id="6" name="TextBox 5"/>
           <p:cNvSpPr txBox="1"/>
           <p:nvPr/>
         </p:nvSpPr>
@@ -7227,7 +7402,7 @@
       </p:sp>
       <p:sp>
         <p:nvSpPr>
-          <p:cNvPr id="5" name="TextBox 4"/>
+          <p:cNvPr id="7" name="TextBox 6"/>
           <p:cNvSpPr txBox="1"/>
           <p:nvPr/>
         </p:nvSpPr>
@@ -7286,42 +7461,112 @@
         </p:nvSpPr>
         <p:spPr>
           <a:xfrm>
-            <a:off x="365750" y="274320"/>
-            <a:ext cx="10972525" cy="480060"/>
-          </a:xfrm>
-          <a:prstGeom prst="rect">
-            <a:avLst/>
-          </a:prstGeom>
-          <a:noFill/>
-        </p:spPr>
-        <p:txBody>
-          <a:bodyPr wrap="square" lIns="36000" rIns="36000" tIns="18000" bIns="18000">
-            <a:spAutoFit/>
-          </a:bodyPr>
-          <a:lstStyle/>
-          <a:p>
-            <a:pPr algn="l"/>
-            <a:r>
-              <a:rPr sz="1700" b="1">
+            <a:off x="487667" y="137160"/>
+            <a:ext cx="7315017" cy="274320"/>
+          </a:xfrm>
+          <a:prstGeom prst="rect">
+            <a:avLst/>
+          </a:prstGeom>
+          <a:noFill/>
+        </p:spPr>
+        <p:txBody>
+          <a:bodyPr wrap="square" lIns="36000" rIns="36000" tIns="18000" bIns="18000">
+            <a:spAutoFit/>
+          </a:bodyPr>
+          <a:lstStyle/>
+          <a:p>
+            <a:pPr algn="l"/>
+            <a:r>
+              <a:rPr sz="900" b="0">
+                <a:solidFill>
+                  <a:srgbClr val="767676"/>
+                </a:solidFill>
+                <a:latin typeface="Pretendard"/>
+              </a:rPr>
+              <a:t>디자인 시안전략</a:t>
+            </a:r>
+          </a:p>
+        </p:txBody>
+      </p:sp>
+      <p:sp>
+        <p:nvSpPr>
+          <p:cNvPr id="3" name="TextBox 2"/>
+          <p:cNvSpPr txBox="1"/>
+          <p:nvPr/>
+        </p:nvSpPr>
+        <p:spPr>
+          <a:xfrm>
+            <a:off x="487667" y="548640"/>
+            <a:ext cx="11216359" cy="548640"/>
+          </a:xfrm>
+          <a:prstGeom prst="rect">
+            <a:avLst/>
+          </a:prstGeom>
+          <a:noFill/>
+        </p:spPr>
+        <p:txBody>
+          <a:bodyPr wrap="square" lIns="36000" rIns="36000" tIns="18000" bIns="18000">
+            <a:spAutoFit/>
+          </a:bodyPr>
+          <a:lstStyle/>
+          <a:p>
+            <a:pPr algn="l"/>
+            <a:r>
+              <a:rPr sz="2400" b="1">
                 <a:solidFill>
                   <a:srgbClr val="1A1A1A"/>
                 </a:solidFill>
                 <a:latin typeface="Pretendard"/>
               </a:rPr>
-              <a:t>4. 시안 변형 3안 — 무작위 변주가 아니라 전략적 베팅</a:t>
-            </a:r>
-          </a:p>
-        </p:txBody>
-      </p:sp>
-      <p:sp>
-        <p:nvSpPr>
-          <p:cNvPr id="3" name="Rectangle 2"/>
+              <a:t>시안 변형 3안</a:t>
+            </a:r>
+          </a:p>
+        </p:txBody>
+      </p:sp>
+      <p:sp>
+        <p:nvSpPr>
+          <p:cNvPr id="4" name="TextBox 3"/>
+          <p:cNvSpPr txBox="1"/>
+          <p:nvPr/>
+        </p:nvSpPr>
+        <p:spPr>
+          <a:xfrm>
+            <a:off x="487667" y="1097280"/>
+            <a:ext cx="11216359" cy="377190"/>
+          </a:xfrm>
+          <a:prstGeom prst="rect">
+            <a:avLst/>
+          </a:prstGeom>
+          <a:noFill/>
+        </p:spPr>
+        <p:txBody>
+          <a:bodyPr wrap="square" lIns="36000" rIns="36000" tIns="18000" bIns="18000">
+            <a:spAutoFit/>
+          </a:bodyPr>
+          <a:lstStyle/>
+          <a:p>
+            <a:pPr algn="l"/>
+            <a:r>
+              <a:rPr sz="1200" b="0">
+                <a:solidFill>
+                  <a:srgbClr val="767676"/>
+                </a:solidFill>
+                <a:latin typeface="Pretendard"/>
+              </a:rPr>
+              <a:t>무작위 변주가 아니라 전략적 베팅</a:t>
+            </a:r>
+          </a:p>
+        </p:txBody>
+      </p:sp>
+      <p:sp>
+        <p:nvSpPr>
+          <p:cNvPr id="5" name="Rectangle 4"/>
           <p:cNvSpPr/>
           <p:nvPr/>
         </p:nvSpPr>
         <p:spPr>
           <a:xfrm>
-            <a:off x="365750" y="891540"/>
+            <a:off x="487667" y="1577340"/>
             <a:ext cx="3169840" cy="377190"/>
           </a:xfrm>
           <a:prstGeom prst="rect">
@@ -7361,13 +7606,13 @@
       </p:sp>
       <p:sp>
         <p:nvSpPr>
-          <p:cNvPr id="4" name="TextBox 3"/>
-          <p:cNvSpPr txBox="1"/>
-          <p:nvPr/>
-        </p:nvSpPr>
-        <p:spPr>
-          <a:xfrm>
-            <a:off x="365750" y="946404"/>
+          <p:cNvPr id="6" name="TextBox 5"/>
+          <p:cNvSpPr txBox="1"/>
+          <p:nvPr/>
+        </p:nvSpPr>
+        <p:spPr>
+          <a:xfrm>
+            <a:off x="487667" y="1632204"/>
             <a:ext cx="3169840" cy="301752"/>
           </a:xfrm>
           <a:prstGeom prst="rect">
@@ -7396,13 +7641,13 @@
       </p:sp>
       <p:sp>
         <p:nvSpPr>
-          <p:cNvPr id="5" name="Rectangle 4"/>
+          <p:cNvPr id="7" name="Rectangle 6"/>
           <p:cNvSpPr/>
           <p:nvPr/>
         </p:nvSpPr>
         <p:spPr>
           <a:xfrm>
-            <a:off x="3535591" y="891540"/>
+            <a:off x="3657508" y="1577340"/>
             <a:ext cx="8290352" cy="377190"/>
           </a:xfrm>
           <a:prstGeom prst="rect">
@@ -7442,13 +7687,13 @@
       </p:sp>
       <p:sp>
         <p:nvSpPr>
-          <p:cNvPr id="6" name="TextBox 5"/>
-          <p:cNvSpPr txBox="1"/>
-          <p:nvPr/>
-        </p:nvSpPr>
-        <p:spPr>
-          <a:xfrm>
-            <a:off x="3535591" y="946404"/>
+          <p:cNvPr id="8" name="TextBox 7"/>
+          <p:cNvSpPr txBox="1"/>
+          <p:nvPr/>
+        </p:nvSpPr>
+        <p:spPr>
+          <a:xfrm>
+            <a:off x="3657508" y="1632204"/>
             <a:ext cx="8290352" cy="301752"/>
           </a:xfrm>
           <a:prstGeom prst="rect">
@@ -7477,13 +7722,13 @@
       </p:sp>
       <p:sp>
         <p:nvSpPr>
-          <p:cNvPr id="7" name="Rectangle 6"/>
+          <p:cNvPr id="9" name="Rectangle 8"/>
           <p:cNvSpPr/>
           <p:nvPr/>
         </p:nvSpPr>
         <p:spPr>
           <a:xfrm>
-            <a:off x="365750" y="1268730"/>
+            <a:off x="487667" y="1954530"/>
             <a:ext cx="3169840" cy="534924"/>
           </a:xfrm>
           <a:prstGeom prst="rect">
@@ -7523,13 +7768,13 @@
       </p:sp>
       <p:sp>
         <p:nvSpPr>
-          <p:cNvPr id="8" name="TextBox 7"/>
-          <p:cNvSpPr txBox="1"/>
-          <p:nvPr/>
-        </p:nvSpPr>
-        <p:spPr>
-          <a:xfrm>
-            <a:off x="365750" y="1296161"/>
+          <p:cNvPr id="10" name="TextBox 9"/>
+          <p:cNvSpPr txBox="1"/>
+          <p:nvPr/>
+        </p:nvSpPr>
+        <p:spPr>
+          <a:xfrm>
+            <a:off x="487667" y="1981962"/>
             <a:ext cx="3169840" cy="480060"/>
           </a:xfrm>
           <a:prstGeom prst="rect">
@@ -7545,7 +7790,7 @@
           <a:p>
             <a:pPr algn="l"/>
             <a:r>
-              <a:rPr sz="750" b="0">
+              <a:rPr sz="800" b="0">
                 <a:solidFill>
                   <a:srgbClr val="1A1A1A"/>
                 </a:solidFill>
@@ -7558,13 +7803,13 @@
       </p:sp>
       <p:sp>
         <p:nvSpPr>
-          <p:cNvPr id="9" name="Rectangle 8"/>
+          <p:cNvPr id="11" name="Rectangle 10"/>
           <p:cNvSpPr/>
           <p:nvPr/>
         </p:nvSpPr>
         <p:spPr>
           <a:xfrm>
-            <a:off x="3535591" y="1268730"/>
+            <a:off x="3657508" y="1954530"/>
             <a:ext cx="8290352" cy="534924"/>
           </a:xfrm>
           <a:prstGeom prst="rect">
@@ -7604,13 +7849,13 @@
       </p:sp>
       <p:sp>
         <p:nvSpPr>
-          <p:cNvPr id="10" name="TextBox 9"/>
-          <p:cNvSpPr txBox="1"/>
-          <p:nvPr/>
-        </p:nvSpPr>
-        <p:spPr>
-          <a:xfrm>
-            <a:off x="3535591" y="1296161"/>
+          <p:cNvPr id="12" name="TextBox 11"/>
+          <p:cNvSpPr txBox="1"/>
+          <p:nvPr/>
+        </p:nvSpPr>
+        <p:spPr>
+          <a:xfrm>
+            <a:off x="3657508" y="1981962"/>
             <a:ext cx="8290352" cy="480060"/>
           </a:xfrm>
           <a:prstGeom prst="rect">
@@ -7626,7 +7871,7 @@
           <a:p>
             <a:pPr algn="l"/>
             <a:r>
-              <a:rPr sz="750" b="0">
+              <a:rPr sz="800" b="0">
                 <a:solidFill>
                   <a:srgbClr val="1A1A1A"/>
                 </a:solidFill>
@@ -7639,13 +7884,13 @@
       </p:sp>
       <p:sp>
         <p:nvSpPr>
-          <p:cNvPr id="11" name="Rectangle 10"/>
+          <p:cNvPr id="13" name="Rectangle 12"/>
           <p:cNvSpPr/>
           <p:nvPr/>
         </p:nvSpPr>
         <p:spPr>
           <a:xfrm>
-            <a:off x="365750" y="1803654"/>
+            <a:off x="487667" y="2489453"/>
             <a:ext cx="3169840" cy="534924"/>
           </a:xfrm>
           <a:prstGeom prst="rect">
@@ -7685,13 +7930,13 @@
       </p:sp>
       <p:sp>
         <p:nvSpPr>
-          <p:cNvPr id="12" name="TextBox 11"/>
-          <p:cNvSpPr txBox="1"/>
-          <p:nvPr/>
-        </p:nvSpPr>
-        <p:spPr>
-          <a:xfrm>
-            <a:off x="365750" y="1831086"/>
+          <p:cNvPr id="14" name="TextBox 13"/>
+          <p:cNvSpPr txBox="1"/>
+          <p:nvPr/>
+        </p:nvSpPr>
+        <p:spPr>
+          <a:xfrm>
+            <a:off x="487667" y="2516885"/>
             <a:ext cx="3169840" cy="480060"/>
           </a:xfrm>
           <a:prstGeom prst="rect">
@@ -7707,7 +7952,7 @@
           <a:p>
             <a:pPr algn="l"/>
             <a:r>
-              <a:rPr sz="750" b="0">
+              <a:rPr sz="800" b="0">
                 <a:solidFill>
                   <a:srgbClr val="1A1A1A"/>
                 </a:solidFill>
@@ -7720,13 +7965,13 @@
       </p:sp>
       <p:sp>
         <p:nvSpPr>
-          <p:cNvPr id="13" name="Rectangle 12"/>
+          <p:cNvPr id="15" name="Rectangle 14"/>
           <p:cNvSpPr/>
           <p:nvPr/>
         </p:nvSpPr>
         <p:spPr>
           <a:xfrm>
-            <a:off x="3535591" y="1803654"/>
+            <a:off x="3657508" y="2489453"/>
             <a:ext cx="8290352" cy="534924"/>
           </a:xfrm>
           <a:prstGeom prst="rect">
@@ -7766,13 +8011,13 @@
       </p:sp>
       <p:sp>
         <p:nvSpPr>
-          <p:cNvPr id="14" name="TextBox 13"/>
-          <p:cNvSpPr txBox="1"/>
-          <p:nvPr/>
-        </p:nvSpPr>
-        <p:spPr>
-          <a:xfrm>
-            <a:off x="3535591" y="1831086"/>
+          <p:cNvPr id="16" name="TextBox 15"/>
+          <p:cNvSpPr txBox="1"/>
+          <p:nvPr/>
+        </p:nvSpPr>
+        <p:spPr>
+          <a:xfrm>
+            <a:off x="3657508" y="2516885"/>
             <a:ext cx="8290352" cy="480060"/>
           </a:xfrm>
           <a:prstGeom prst="rect">
@@ -7788,7 +8033,7 @@
           <a:p>
             <a:pPr algn="l"/>
             <a:r>
-              <a:rPr sz="750" b="0">
+              <a:rPr sz="800" b="0">
                 <a:solidFill>
                   <a:srgbClr val="1A1A1A"/>
                 </a:solidFill>
@@ -7801,13 +8046,13 @@
       </p:sp>
       <p:sp>
         <p:nvSpPr>
-          <p:cNvPr id="15" name="Rectangle 14"/>
+          <p:cNvPr id="17" name="Rectangle 16"/>
           <p:cNvSpPr/>
           <p:nvPr/>
         </p:nvSpPr>
         <p:spPr>
           <a:xfrm>
-            <a:off x="365750" y="2338578"/>
+            <a:off x="487667" y="3024377"/>
             <a:ext cx="3169840" cy="534924"/>
           </a:xfrm>
           <a:prstGeom prst="rect">
@@ -7847,13 +8092,13 @@
       </p:sp>
       <p:sp>
         <p:nvSpPr>
-          <p:cNvPr id="16" name="TextBox 15"/>
-          <p:cNvSpPr txBox="1"/>
-          <p:nvPr/>
-        </p:nvSpPr>
-        <p:spPr>
-          <a:xfrm>
-            <a:off x="365750" y="2366010"/>
+          <p:cNvPr id="18" name="TextBox 17"/>
+          <p:cNvSpPr txBox="1"/>
+          <p:nvPr/>
+        </p:nvSpPr>
+        <p:spPr>
+          <a:xfrm>
+            <a:off x="487667" y="3051809"/>
             <a:ext cx="3169840" cy="480060"/>
           </a:xfrm>
           <a:prstGeom prst="rect">
@@ -7869,7 +8114,7 @@
           <a:p>
             <a:pPr algn="l"/>
             <a:r>
-              <a:rPr sz="750" b="0">
+              <a:rPr sz="800" b="0">
                 <a:solidFill>
                   <a:srgbClr val="1A1A1A"/>
                 </a:solidFill>
@@ -7882,13 +8127,13 @@
       </p:sp>
       <p:sp>
         <p:nvSpPr>
-          <p:cNvPr id="17" name="Rectangle 16"/>
+          <p:cNvPr id="19" name="Rectangle 18"/>
           <p:cNvSpPr/>
           <p:nvPr/>
         </p:nvSpPr>
         <p:spPr>
           <a:xfrm>
-            <a:off x="3535591" y="2338578"/>
+            <a:off x="3657508" y="3024377"/>
             <a:ext cx="8290352" cy="534924"/>
           </a:xfrm>
           <a:prstGeom prst="rect">
@@ -7928,13 +8173,13 @@
       </p:sp>
       <p:sp>
         <p:nvSpPr>
-          <p:cNvPr id="18" name="TextBox 17"/>
-          <p:cNvSpPr txBox="1"/>
-          <p:nvPr/>
-        </p:nvSpPr>
-        <p:spPr>
-          <a:xfrm>
-            <a:off x="3535591" y="2366010"/>
+          <p:cNvPr id="20" name="TextBox 19"/>
+          <p:cNvSpPr txBox="1"/>
+          <p:nvPr/>
+        </p:nvSpPr>
+        <p:spPr>
+          <a:xfrm>
+            <a:off x="3657508" y="3051809"/>
             <a:ext cx="8290352" cy="480060"/>
           </a:xfrm>
           <a:prstGeom prst="rect">
@@ -7950,7 +8195,7 @@
           <a:p>
             <a:pPr algn="l"/>
             <a:r>
-              <a:rPr sz="750" b="0">
+              <a:rPr sz="800" b="0">
                 <a:solidFill>
                   <a:srgbClr val="1A1A1A"/>
                 </a:solidFill>
@@ -7963,13 +8208,13 @@
       </p:sp>
       <p:sp>
         <p:nvSpPr>
-          <p:cNvPr id="19" name="Rectangle 18"/>
+          <p:cNvPr id="21" name="Rectangle 20"/>
           <p:cNvSpPr/>
           <p:nvPr/>
         </p:nvSpPr>
         <p:spPr>
           <a:xfrm>
-            <a:off x="365750" y="2873502"/>
+            <a:off x="487667" y="3559301"/>
             <a:ext cx="3169840" cy="534924"/>
           </a:xfrm>
           <a:prstGeom prst="rect">
@@ -8009,13 +8254,13 @@
       </p:sp>
       <p:sp>
         <p:nvSpPr>
-          <p:cNvPr id="20" name="TextBox 19"/>
-          <p:cNvSpPr txBox="1"/>
-          <p:nvPr/>
-        </p:nvSpPr>
-        <p:spPr>
-          <a:xfrm>
-            <a:off x="365750" y="2900934"/>
+          <p:cNvPr id="22" name="TextBox 21"/>
+          <p:cNvSpPr txBox="1"/>
+          <p:nvPr/>
+        </p:nvSpPr>
+        <p:spPr>
+          <a:xfrm>
+            <a:off x="487667" y="3586733"/>
             <a:ext cx="3169840" cy="480060"/>
           </a:xfrm>
           <a:prstGeom prst="rect">
@@ -8031,7 +8276,7 @@
           <a:p>
             <a:pPr algn="l"/>
             <a:r>
-              <a:rPr sz="750" b="0">
+              <a:rPr sz="800" b="0">
                 <a:solidFill>
                   <a:srgbClr val="1A1A1A"/>
                 </a:solidFill>
@@ -8044,13 +8289,13 @@
       </p:sp>
       <p:sp>
         <p:nvSpPr>
-          <p:cNvPr id="21" name="Rectangle 20"/>
+          <p:cNvPr id="23" name="Rectangle 22"/>
           <p:cNvSpPr/>
           <p:nvPr/>
         </p:nvSpPr>
         <p:spPr>
           <a:xfrm>
-            <a:off x="3535591" y="2873502"/>
+            <a:off x="3657508" y="3559301"/>
             <a:ext cx="8290352" cy="534924"/>
           </a:xfrm>
           <a:prstGeom prst="rect">
@@ -8090,13 +8335,13 @@
       </p:sp>
       <p:sp>
         <p:nvSpPr>
-          <p:cNvPr id="22" name="TextBox 21"/>
-          <p:cNvSpPr txBox="1"/>
-          <p:nvPr/>
-        </p:nvSpPr>
-        <p:spPr>
-          <a:xfrm>
-            <a:off x="3535591" y="2900934"/>
+          <p:cNvPr id="24" name="TextBox 23"/>
+          <p:cNvSpPr txBox="1"/>
+          <p:nvPr/>
+        </p:nvSpPr>
+        <p:spPr>
+          <a:xfrm>
+            <a:off x="3657508" y="3586733"/>
             <a:ext cx="8290352" cy="480060"/>
           </a:xfrm>
           <a:prstGeom prst="rect">
@@ -8112,7 +8357,7 @@
           <a:p>
             <a:pPr algn="l"/>
             <a:r>
-              <a:rPr sz="750" b="0">
+              <a:rPr sz="800" b="0">
                 <a:solidFill>
                   <a:srgbClr val="1A1A1A"/>
                 </a:solidFill>
@@ -8125,13 +8370,13 @@
       </p:sp>
       <p:sp>
         <p:nvSpPr>
-          <p:cNvPr id="23" name="Rectangle 22"/>
+          <p:cNvPr id="25" name="Rectangle 24"/>
           <p:cNvSpPr/>
           <p:nvPr/>
         </p:nvSpPr>
         <p:spPr>
           <a:xfrm>
-            <a:off x="365750" y="3408426"/>
+            <a:off x="487667" y="4094225"/>
             <a:ext cx="3169840" cy="534924"/>
           </a:xfrm>
           <a:prstGeom prst="rect">
@@ -8171,13 +8416,13 @@
       </p:sp>
       <p:sp>
         <p:nvSpPr>
-          <p:cNvPr id="24" name="TextBox 23"/>
-          <p:cNvSpPr txBox="1"/>
-          <p:nvPr/>
-        </p:nvSpPr>
-        <p:spPr>
-          <a:xfrm>
-            <a:off x="365750" y="3435857"/>
+          <p:cNvPr id="26" name="TextBox 25"/>
+          <p:cNvSpPr txBox="1"/>
+          <p:nvPr/>
+        </p:nvSpPr>
+        <p:spPr>
+          <a:xfrm>
+            <a:off x="487667" y="4121657"/>
             <a:ext cx="3169840" cy="480060"/>
           </a:xfrm>
           <a:prstGeom prst="rect">
@@ -8193,7 +8438,7 @@
           <a:p>
             <a:pPr algn="l"/>
             <a:r>
-              <a:rPr sz="750" b="0">
+              <a:rPr sz="800" b="0">
                 <a:solidFill>
                   <a:srgbClr val="1A1A1A"/>
                 </a:solidFill>
@@ -8206,13 +8451,13 @@
       </p:sp>
       <p:sp>
         <p:nvSpPr>
-          <p:cNvPr id="25" name="Rectangle 24"/>
+          <p:cNvPr id="27" name="Rectangle 26"/>
           <p:cNvSpPr/>
           <p:nvPr/>
         </p:nvSpPr>
         <p:spPr>
           <a:xfrm>
-            <a:off x="3535591" y="3408426"/>
+            <a:off x="3657508" y="4094225"/>
             <a:ext cx="8290352" cy="534924"/>
           </a:xfrm>
           <a:prstGeom prst="rect">
@@ -8252,13 +8497,13 @@
       </p:sp>
       <p:sp>
         <p:nvSpPr>
-          <p:cNvPr id="26" name="TextBox 25"/>
-          <p:cNvSpPr txBox="1"/>
-          <p:nvPr/>
-        </p:nvSpPr>
-        <p:spPr>
-          <a:xfrm>
-            <a:off x="3535591" y="3435857"/>
+          <p:cNvPr id="28" name="TextBox 27"/>
+          <p:cNvSpPr txBox="1"/>
+          <p:nvPr/>
+        </p:nvSpPr>
+        <p:spPr>
+          <a:xfrm>
+            <a:off x="3657508" y="4121657"/>
             <a:ext cx="8290352" cy="480060"/>
           </a:xfrm>
           <a:prstGeom prst="rect">
@@ -8274,7 +8519,7 @@
           <a:p>
             <a:pPr algn="l"/>
             <a:r>
-              <a:rPr sz="750" b="0">
+              <a:rPr sz="800" b="0">
                 <a:solidFill>
                   <a:srgbClr val="1A1A1A"/>
                 </a:solidFill>
@@ -8287,13 +8532,13 @@
       </p:sp>
       <p:sp>
         <p:nvSpPr>
-          <p:cNvPr id="27" name="Rectangle 26"/>
+          <p:cNvPr id="29" name="Rectangle 28"/>
           <p:cNvSpPr/>
           <p:nvPr/>
         </p:nvSpPr>
         <p:spPr>
           <a:xfrm>
-            <a:off x="365750" y="3943349"/>
+            <a:off x="487667" y="4629149"/>
             <a:ext cx="3169840" cy="534924"/>
           </a:xfrm>
           <a:prstGeom prst="rect">
@@ -8333,13 +8578,13 @@
       </p:sp>
       <p:sp>
         <p:nvSpPr>
-          <p:cNvPr id="28" name="TextBox 27"/>
-          <p:cNvSpPr txBox="1"/>
-          <p:nvPr/>
-        </p:nvSpPr>
-        <p:spPr>
-          <a:xfrm>
-            <a:off x="365750" y="3970781"/>
+          <p:cNvPr id="30" name="TextBox 29"/>
+          <p:cNvSpPr txBox="1"/>
+          <p:nvPr/>
+        </p:nvSpPr>
+        <p:spPr>
+          <a:xfrm>
+            <a:off x="487667" y="4656581"/>
             <a:ext cx="3169840" cy="480060"/>
           </a:xfrm>
           <a:prstGeom prst="rect">
@@ -8355,7 +8600,7 @@
           <a:p>
             <a:pPr algn="l"/>
             <a:r>
-              <a:rPr sz="750" b="0">
+              <a:rPr sz="800" b="0">
                 <a:solidFill>
                   <a:srgbClr val="1A1A1A"/>
                 </a:solidFill>
@@ -8368,13 +8613,13 @@
       </p:sp>
       <p:sp>
         <p:nvSpPr>
-          <p:cNvPr id="29" name="Rectangle 28"/>
+          <p:cNvPr id="31" name="Rectangle 30"/>
           <p:cNvSpPr/>
           <p:nvPr/>
         </p:nvSpPr>
         <p:spPr>
           <a:xfrm>
-            <a:off x="3535591" y="3943349"/>
+            <a:off x="3657508" y="4629149"/>
             <a:ext cx="8290352" cy="534924"/>
           </a:xfrm>
           <a:prstGeom prst="rect">
@@ -8414,13 +8659,13 @@
       </p:sp>
       <p:sp>
         <p:nvSpPr>
-          <p:cNvPr id="30" name="TextBox 29"/>
-          <p:cNvSpPr txBox="1"/>
-          <p:nvPr/>
-        </p:nvSpPr>
-        <p:spPr>
-          <a:xfrm>
-            <a:off x="3535591" y="3970781"/>
+          <p:cNvPr id="32" name="TextBox 31"/>
+          <p:cNvSpPr txBox="1"/>
+          <p:nvPr/>
+        </p:nvSpPr>
+        <p:spPr>
+          <a:xfrm>
+            <a:off x="3657508" y="4656581"/>
             <a:ext cx="8290352" cy="480060"/>
           </a:xfrm>
           <a:prstGeom prst="rect">
@@ -8436,7 +8681,7 @@
           <a:p>
             <a:pPr algn="l"/>
             <a:r>
-              <a:rPr sz="750" b="0">
+              <a:rPr sz="800" b="0">
                 <a:solidFill>
                   <a:srgbClr val="1A1A1A"/>
                 </a:solidFill>
@@ -8449,13 +8694,13 @@
       </p:sp>
       <p:sp>
         <p:nvSpPr>
-          <p:cNvPr id="31" name="Rectangle 30"/>
+          <p:cNvPr id="33" name="Rectangle 32"/>
           <p:cNvSpPr/>
           <p:nvPr/>
         </p:nvSpPr>
         <p:spPr>
           <a:xfrm>
-            <a:off x="365750" y="4478274"/>
+            <a:off x="487667" y="5164073"/>
             <a:ext cx="3169840" cy="411480"/>
           </a:xfrm>
           <a:prstGeom prst="rect">
@@ -8495,13 +8740,13 @@
       </p:sp>
       <p:sp>
         <p:nvSpPr>
-          <p:cNvPr id="32" name="TextBox 31"/>
-          <p:cNvSpPr txBox="1"/>
-          <p:nvPr/>
-        </p:nvSpPr>
-        <p:spPr>
-          <a:xfrm>
-            <a:off x="365750" y="4505706"/>
+          <p:cNvPr id="34" name="TextBox 33"/>
+          <p:cNvSpPr txBox="1"/>
+          <p:nvPr/>
+        </p:nvSpPr>
+        <p:spPr>
+          <a:xfrm>
+            <a:off x="487667" y="5191505"/>
             <a:ext cx="3169840" cy="356616"/>
           </a:xfrm>
           <a:prstGeom prst="rect">
@@ -8517,7 +8762,7 @@
           <a:p>
             <a:pPr algn="l"/>
             <a:r>
-              <a:rPr sz="750" b="0">
+              <a:rPr sz="800" b="0">
                 <a:solidFill>
                   <a:srgbClr val="1A1A1A"/>
                 </a:solidFill>
@@ -8530,13 +8775,13 @@
       </p:sp>
       <p:sp>
         <p:nvSpPr>
-          <p:cNvPr id="33" name="Rectangle 32"/>
+          <p:cNvPr id="35" name="Rectangle 34"/>
           <p:cNvSpPr/>
           <p:nvPr/>
         </p:nvSpPr>
         <p:spPr>
           <a:xfrm>
-            <a:off x="3535591" y="4478274"/>
+            <a:off x="3657508" y="5164073"/>
             <a:ext cx="8290352" cy="411480"/>
           </a:xfrm>
           <a:prstGeom prst="rect">
@@ -8576,13 +8821,13 @@
       </p:sp>
       <p:sp>
         <p:nvSpPr>
-          <p:cNvPr id="34" name="TextBox 33"/>
-          <p:cNvSpPr txBox="1"/>
-          <p:nvPr/>
-        </p:nvSpPr>
-        <p:spPr>
-          <a:xfrm>
-            <a:off x="3535591" y="4505706"/>
+          <p:cNvPr id="36" name="TextBox 35"/>
+          <p:cNvSpPr txBox="1"/>
+          <p:nvPr/>
+        </p:nvSpPr>
+        <p:spPr>
+          <a:xfrm>
+            <a:off x="3657508" y="5191505"/>
             <a:ext cx="8290352" cy="356616"/>
           </a:xfrm>
           <a:prstGeom prst="rect">
@@ -8598,7 +8843,7 @@
           <a:p>
             <a:pPr algn="l"/>
             <a:r>
-              <a:rPr sz="750" b="0">
+              <a:rPr sz="800" b="0">
                 <a:solidFill>
                   <a:srgbClr val="1A1A1A"/>
                 </a:solidFill>
@@ -8611,13 +8856,13 @@
       </p:sp>
       <p:sp>
         <p:nvSpPr>
-          <p:cNvPr id="35" name="Rectangle 34"/>
+          <p:cNvPr id="37" name="Rectangle 36"/>
           <p:cNvSpPr/>
           <p:nvPr/>
         </p:nvSpPr>
         <p:spPr>
           <a:xfrm>
-            <a:off x="365750" y="4889754"/>
+            <a:off x="487667" y="5575553"/>
             <a:ext cx="3169840" cy="534924"/>
           </a:xfrm>
           <a:prstGeom prst="rect">
@@ -8657,13 +8902,13 @@
       </p:sp>
       <p:sp>
         <p:nvSpPr>
-          <p:cNvPr id="36" name="TextBox 35"/>
-          <p:cNvSpPr txBox="1"/>
-          <p:nvPr/>
-        </p:nvSpPr>
-        <p:spPr>
-          <a:xfrm>
-            <a:off x="365750" y="4917186"/>
+          <p:cNvPr id="38" name="TextBox 37"/>
+          <p:cNvSpPr txBox="1"/>
+          <p:nvPr/>
+        </p:nvSpPr>
+        <p:spPr>
+          <a:xfrm>
+            <a:off x="487667" y="5602985"/>
             <a:ext cx="3169840" cy="480060"/>
           </a:xfrm>
           <a:prstGeom prst="rect">
@@ -8679,7 +8924,7 @@
           <a:p>
             <a:pPr algn="l"/>
             <a:r>
-              <a:rPr sz="750" b="0">
+              <a:rPr sz="800" b="0">
                 <a:solidFill>
                   <a:srgbClr val="1A1A1A"/>
                 </a:solidFill>
@@ -8692,13 +8937,13 @@
       </p:sp>
       <p:sp>
         <p:nvSpPr>
-          <p:cNvPr id="37" name="Rectangle 36"/>
+          <p:cNvPr id="39" name="Rectangle 38"/>
           <p:cNvSpPr/>
           <p:nvPr/>
         </p:nvSpPr>
         <p:spPr>
           <a:xfrm>
-            <a:off x="3535591" y="4889754"/>
+            <a:off x="3657508" y="5575553"/>
             <a:ext cx="8290352" cy="534924"/>
           </a:xfrm>
           <a:prstGeom prst="rect">
@@ -8738,13 +8983,13 @@
       </p:sp>
       <p:sp>
         <p:nvSpPr>
-          <p:cNvPr id="38" name="TextBox 37"/>
-          <p:cNvSpPr txBox="1"/>
-          <p:nvPr/>
-        </p:nvSpPr>
-        <p:spPr>
-          <a:xfrm>
-            <a:off x="3535591" y="4917186"/>
+          <p:cNvPr id="40" name="TextBox 39"/>
+          <p:cNvSpPr txBox="1"/>
+          <p:nvPr/>
+        </p:nvSpPr>
+        <p:spPr>
+          <a:xfrm>
+            <a:off x="3657508" y="5602985"/>
             <a:ext cx="8290352" cy="480060"/>
           </a:xfrm>
           <a:prstGeom prst="rect">
@@ -8760,7 +9005,7 @@
           <a:p>
             <a:pPr algn="l"/>
             <a:r>
-              <a:rPr sz="750" b="0">
+              <a:rPr sz="800" b="0">
                 <a:solidFill>
                   <a:srgbClr val="1A1A1A"/>
                 </a:solidFill>
@@ -8773,204 +9018,42 @@
       </p:sp>
       <p:sp>
         <p:nvSpPr>
-          <p:cNvPr id="39" name="Rectangle 38"/>
-          <p:cNvSpPr/>
-          <p:nvPr/>
-        </p:nvSpPr>
-        <p:spPr>
-          <a:xfrm>
-            <a:off x="365750" y="5424678"/>
-            <a:ext cx="3169840" cy="411480"/>
-          </a:xfrm>
-          <a:prstGeom prst="rect">
-            <a:avLst/>
-          </a:prstGeom>
-          <a:solidFill>
-            <a:srgbClr val="FFFFFF"/>
-          </a:solidFill>
-          <a:ln w="9525">
-            <a:solidFill>
-              <a:srgbClr val="D8D8D8"/>
-            </a:solidFill>
-          </a:ln>
-          <a:effectLst/>
-        </p:spPr>
-        <p:style>
-          <a:lnRef idx="1">
-            <a:schemeClr val="accent1"/>
-          </a:lnRef>
-          <a:fillRef idx="3">
-            <a:schemeClr val="accent1"/>
-          </a:fillRef>
-          <a:effectRef idx="2">
-            <a:schemeClr val="accent1"/>
-          </a:effectRef>
-          <a:fontRef idx="minor">
-            <a:schemeClr val="lt1"/>
-          </a:fontRef>
-        </p:style>
-        <p:txBody>
-          <a:bodyPr rtlCol="0" anchor="ctr"/>
-          <a:lstStyle/>
-          <a:p>
-            <a:pPr algn="ctr"/>
-          </a:p>
-        </p:txBody>
-      </p:sp>
-      <p:sp>
-        <p:nvSpPr>
-          <p:cNvPr id="40" name="TextBox 39"/>
-          <p:cNvSpPr txBox="1"/>
-          <p:nvPr/>
-        </p:nvSpPr>
-        <p:spPr>
-          <a:xfrm>
-            <a:off x="365750" y="5452110"/>
-            <a:ext cx="3169840" cy="356616"/>
-          </a:xfrm>
-          <a:prstGeom prst="rect">
-            <a:avLst/>
-          </a:prstGeom>
-          <a:noFill/>
-        </p:spPr>
-        <p:txBody>
-          <a:bodyPr wrap="square" lIns="36000" rIns="36000" tIns="18000" bIns="18000">
-            <a:spAutoFit/>
-          </a:bodyPr>
-          <a:lstStyle/>
-          <a:p>
-            <a:pPr algn="l"/>
-            <a:r>
-              <a:rPr sz="750" b="0">
-                <a:solidFill>
-                  <a:srgbClr val="1A1A1A"/>
-                </a:solidFill>
-                <a:latin typeface="Pretendard"/>
-              </a:rPr>
-              <a:t>포기하는 것</a:t>
-            </a:r>
-          </a:p>
-        </p:txBody>
-      </p:sp>
-      <p:sp>
-        <p:nvSpPr>
-          <p:cNvPr id="41" name="Rectangle 40"/>
-          <p:cNvSpPr/>
-          <p:nvPr/>
-        </p:nvSpPr>
-        <p:spPr>
-          <a:xfrm>
-            <a:off x="3535591" y="5424678"/>
-            <a:ext cx="8290352" cy="411480"/>
-          </a:xfrm>
-          <a:prstGeom prst="rect">
-            <a:avLst/>
-          </a:prstGeom>
-          <a:solidFill>
-            <a:srgbClr val="FFFFFF"/>
-          </a:solidFill>
-          <a:ln w="9525">
-            <a:solidFill>
-              <a:srgbClr val="D8D8D8"/>
-            </a:solidFill>
-          </a:ln>
-          <a:effectLst/>
-        </p:spPr>
-        <p:style>
-          <a:lnRef idx="1">
-            <a:schemeClr val="accent1"/>
-          </a:lnRef>
-          <a:fillRef idx="3">
-            <a:schemeClr val="accent1"/>
-          </a:fillRef>
-          <a:effectRef idx="2">
-            <a:schemeClr val="accent1"/>
-          </a:effectRef>
-          <a:fontRef idx="minor">
-            <a:schemeClr val="lt1"/>
-          </a:fontRef>
-        </p:style>
-        <p:txBody>
-          <a:bodyPr rtlCol="0" anchor="ctr"/>
-          <a:lstStyle/>
-          <a:p>
-            <a:pPr algn="ctr"/>
+          <p:cNvPr id="41" name="TextBox 40"/>
+          <p:cNvSpPr txBox="1"/>
+          <p:nvPr/>
+        </p:nvSpPr>
+        <p:spPr>
+          <a:xfrm>
+            <a:off x="487667" y="6179057"/>
+            <a:ext cx="11216359" cy="274320"/>
+          </a:xfrm>
+          <a:prstGeom prst="rect">
+            <a:avLst/>
+          </a:prstGeom>
+          <a:noFill/>
+        </p:spPr>
+        <p:txBody>
+          <a:bodyPr wrap="square" lIns="36000" rIns="36000" tIns="18000" bIns="18000">
+            <a:spAutoFit/>
+          </a:bodyPr>
+          <a:lstStyle/>
+          <a:p>
+            <a:pPr algn="l"/>
+            <a:r>
+              <a:rPr sz="800" b="0">
+                <a:solidFill>
+                  <a:srgbClr val="767676"/>
+                </a:solidFill>
+                <a:latin typeface="Pretendard"/>
+              </a:rPr>
+              <a:t>※ 이하 11행은 원장·문서 참조</a:t>
+            </a:r>
           </a:p>
         </p:txBody>
       </p:sp>
       <p:sp>
         <p:nvSpPr>
           <p:cNvPr id="42" name="TextBox 41"/>
-          <p:cNvSpPr txBox="1"/>
-          <p:nvPr/>
-        </p:nvSpPr>
-        <p:spPr>
-          <a:xfrm>
-            <a:off x="3535591" y="5452110"/>
-            <a:ext cx="8290352" cy="356616"/>
-          </a:xfrm>
-          <a:prstGeom prst="rect">
-            <a:avLst/>
-          </a:prstGeom>
-          <a:noFill/>
-        </p:spPr>
-        <p:txBody>
-          <a:bodyPr wrap="square" lIns="36000" rIns="36000" tIns="18000" bIns="18000">
-            <a:spAutoFit/>
-          </a:bodyPr>
-          <a:lstStyle/>
-          <a:p>
-            <a:pPr algn="l"/>
-            <a:r>
-              <a:rPr sz="750" b="0">
-                <a:solidFill>
-                  <a:srgbClr val="1A1A1A"/>
-                </a:solidFill>
-                <a:latin typeface="Pretendard"/>
-              </a:rPr>
-              <a:t>정보 밀도. 스크롤이 길어진다</a:t>
-            </a:r>
-          </a:p>
-        </p:txBody>
-      </p:sp>
-      <p:sp>
-        <p:nvSpPr>
-          <p:cNvPr id="43" name="TextBox 42"/>
-          <p:cNvSpPr txBox="1"/>
-          <p:nvPr/>
-        </p:nvSpPr>
-        <p:spPr>
-          <a:xfrm>
-            <a:off x="365750" y="5904738"/>
-            <a:ext cx="10972525" cy="274320"/>
-          </a:xfrm>
-          <a:prstGeom prst="rect">
-            <a:avLst/>
-          </a:prstGeom>
-          <a:noFill/>
-        </p:spPr>
-        <p:txBody>
-          <a:bodyPr wrap="square" lIns="36000" rIns="36000" tIns="18000" bIns="18000">
-            <a:spAutoFit/>
-          </a:bodyPr>
-          <a:lstStyle/>
-          <a:p>
-            <a:pPr algn="l"/>
-            <a:r>
-              <a:rPr sz="800" b="0">
-                <a:solidFill>
-                  <a:srgbClr val="767676"/>
-                </a:solidFill>
-                <a:latin typeface="Pretendard"/>
-              </a:rPr>
-              <a:t>※ 이하 10행은 원장·문서 참조</a:t>
-            </a:r>
-          </a:p>
-        </p:txBody>
-      </p:sp>
-      <p:sp>
-        <p:nvSpPr>
-          <p:cNvPr id="44" name="TextBox 43"/>
           <p:cNvSpPr txBox="1"/>
           <p:nvPr/>
         </p:nvSpPr>
@@ -9005,7 +9088,7 @@
       </p:sp>
       <p:sp>
         <p:nvSpPr>
-          <p:cNvPr id="45" name="TextBox 44"/>
+          <p:cNvPr id="43" name="TextBox 42"/>
           <p:cNvSpPr txBox="1"/>
           <p:nvPr/>
         </p:nvSpPr>
@@ -9064,42 +9147,77 @@
         </p:nvSpPr>
         <p:spPr>
           <a:xfrm>
-            <a:off x="365750" y="274320"/>
-            <a:ext cx="10972525" cy="480060"/>
-          </a:xfrm>
-          <a:prstGeom prst="rect">
-            <a:avLst/>
-          </a:prstGeom>
-          <a:noFill/>
-        </p:spPr>
-        <p:txBody>
-          <a:bodyPr wrap="square" lIns="36000" rIns="36000" tIns="18000" bIns="18000">
-            <a:spAutoFit/>
-          </a:bodyPr>
-          <a:lstStyle/>
-          <a:p>
-            <a:pPr algn="l"/>
-            <a:r>
-              <a:rPr sz="1700" b="1">
+            <a:off x="487667" y="137160"/>
+            <a:ext cx="7315017" cy="274320"/>
+          </a:xfrm>
+          <a:prstGeom prst="rect">
+            <a:avLst/>
+          </a:prstGeom>
+          <a:noFill/>
+        </p:spPr>
+        <p:txBody>
+          <a:bodyPr wrap="square" lIns="36000" rIns="36000" tIns="18000" bIns="18000">
+            <a:spAutoFit/>
+          </a:bodyPr>
+          <a:lstStyle/>
+          <a:p>
+            <a:pPr algn="l"/>
+            <a:r>
+              <a:rPr sz="900" b="0">
+                <a:solidFill>
+                  <a:srgbClr val="767676"/>
+                </a:solidFill>
+                <a:latin typeface="Pretendard"/>
+              </a:rPr>
+              <a:t>디자인 시안전략</a:t>
+            </a:r>
+          </a:p>
+        </p:txBody>
+      </p:sp>
+      <p:sp>
+        <p:nvSpPr>
+          <p:cNvPr id="3" name="TextBox 2"/>
+          <p:cNvSpPr txBox="1"/>
+          <p:nvPr/>
+        </p:nvSpPr>
+        <p:spPr>
+          <a:xfrm>
+            <a:off x="487667" y="548640"/>
+            <a:ext cx="11216359" cy="548640"/>
+          </a:xfrm>
+          <a:prstGeom prst="rect">
+            <a:avLst/>
+          </a:prstGeom>
+          <a:noFill/>
+        </p:spPr>
+        <p:txBody>
+          <a:bodyPr wrap="square" lIns="36000" rIns="36000" tIns="18000" bIns="18000">
+            <a:spAutoFit/>
+          </a:bodyPr>
+          <a:lstStyle/>
+          <a:p>
+            <a:pPr algn="l"/>
+            <a:r>
+              <a:rPr sz="2400" b="1">
                 <a:solidFill>
                   <a:srgbClr val="1A1A1A"/>
                 </a:solidFill>
                 <a:latin typeface="Pretendard"/>
               </a:rPr>
-              <a:t>5. 표준스타일가이드 상속</a:t>
-            </a:r>
-          </a:p>
-        </p:txBody>
-      </p:sp>
-      <p:sp>
-        <p:nvSpPr>
-          <p:cNvPr id="3" name="Rectangle 2"/>
+              <a:t>표준스타일가이드 상속</a:t>
+            </a:r>
+          </a:p>
+        </p:txBody>
+      </p:sp>
+      <p:sp>
+        <p:nvSpPr>
+          <p:cNvPr id="4" name="Rectangle 3"/>
           <p:cNvSpPr/>
           <p:nvPr/>
         </p:nvSpPr>
         <p:spPr>
           <a:xfrm>
-            <a:off x="365750" y="891540"/>
+            <a:off x="487667" y="1234440"/>
             <a:ext cx="3169840" cy="377190"/>
           </a:xfrm>
           <a:prstGeom prst="rect">
@@ -9139,13 +9257,13 @@
       </p:sp>
       <p:sp>
         <p:nvSpPr>
-          <p:cNvPr id="4" name="TextBox 3"/>
-          <p:cNvSpPr txBox="1"/>
-          <p:nvPr/>
-        </p:nvSpPr>
-        <p:spPr>
-          <a:xfrm>
-            <a:off x="365750" y="946404"/>
+          <p:cNvPr id="5" name="TextBox 4"/>
+          <p:cNvSpPr txBox="1"/>
+          <p:nvPr/>
+        </p:nvSpPr>
+        <p:spPr>
+          <a:xfrm>
+            <a:off x="487667" y="1289304"/>
             <a:ext cx="3169840" cy="301752"/>
           </a:xfrm>
           <a:prstGeom prst="rect">
@@ -9174,13 +9292,13 @@
       </p:sp>
       <p:sp>
         <p:nvSpPr>
-          <p:cNvPr id="5" name="Rectangle 4"/>
+          <p:cNvPr id="6" name="Rectangle 5"/>
           <p:cNvSpPr/>
           <p:nvPr/>
         </p:nvSpPr>
         <p:spPr>
           <a:xfrm>
-            <a:off x="3535591" y="891540"/>
+            <a:off x="3657508" y="1234440"/>
             <a:ext cx="4145176" cy="377190"/>
           </a:xfrm>
           <a:prstGeom prst="rect">
@@ -9220,13 +9338,13 @@
       </p:sp>
       <p:sp>
         <p:nvSpPr>
-          <p:cNvPr id="6" name="TextBox 5"/>
-          <p:cNvSpPr txBox="1"/>
-          <p:nvPr/>
-        </p:nvSpPr>
-        <p:spPr>
-          <a:xfrm>
-            <a:off x="3535591" y="946404"/>
+          <p:cNvPr id="7" name="TextBox 6"/>
+          <p:cNvSpPr txBox="1"/>
+          <p:nvPr/>
+        </p:nvSpPr>
+        <p:spPr>
+          <a:xfrm>
+            <a:off x="3657508" y="1289304"/>
             <a:ext cx="4145176" cy="301752"/>
           </a:xfrm>
           <a:prstGeom prst="rect">
@@ -9255,13 +9373,13 @@
       </p:sp>
       <p:sp>
         <p:nvSpPr>
-          <p:cNvPr id="7" name="Rectangle 6"/>
+          <p:cNvPr id="8" name="Rectangle 7"/>
           <p:cNvSpPr/>
           <p:nvPr/>
         </p:nvSpPr>
         <p:spPr>
           <a:xfrm>
-            <a:off x="7680767" y="891540"/>
+            <a:off x="7802684" y="1234440"/>
             <a:ext cx="4145176" cy="377190"/>
           </a:xfrm>
           <a:prstGeom prst="rect">
@@ -9301,13 +9419,13 @@
       </p:sp>
       <p:sp>
         <p:nvSpPr>
-          <p:cNvPr id="8" name="TextBox 7"/>
-          <p:cNvSpPr txBox="1"/>
-          <p:nvPr/>
-        </p:nvSpPr>
-        <p:spPr>
-          <a:xfrm>
-            <a:off x="7680767" y="946404"/>
+          <p:cNvPr id="9" name="TextBox 8"/>
+          <p:cNvSpPr txBox="1"/>
+          <p:nvPr/>
+        </p:nvSpPr>
+        <p:spPr>
+          <a:xfrm>
+            <a:off x="7802684" y="1289304"/>
             <a:ext cx="4145176" cy="301752"/>
           </a:xfrm>
           <a:prstGeom prst="rect">
@@ -9336,13 +9454,13 @@
       </p:sp>
       <p:sp>
         <p:nvSpPr>
-          <p:cNvPr id="9" name="Rectangle 8"/>
+          <p:cNvPr id="10" name="Rectangle 9"/>
           <p:cNvSpPr/>
           <p:nvPr/>
         </p:nvSpPr>
         <p:spPr>
           <a:xfrm>
-            <a:off x="365750" y="1268730"/>
+            <a:off x="487667" y="1611630"/>
             <a:ext cx="3169840" cy="411480"/>
           </a:xfrm>
           <a:prstGeom prst="rect">
@@ -9382,13 +9500,13 @@
       </p:sp>
       <p:sp>
         <p:nvSpPr>
-          <p:cNvPr id="10" name="TextBox 9"/>
-          <p:cNvSpPr txBox="1"/>
-          <p:nvPr/>
-        </p:nvSpPr>
-        <p:spPr>
-          <a:xfrm>
-            <a:off x="365750" y="1296161"/>
+          <p:cNvPr id="11" name="TextBox 10"/>
+          <p:cNvSpPr txBox="1"/>
+          <p:nvPr/>
+        </p:nvSpPr>
+        <p:spPr>
+          <a:xfrm>
+            <a:off x="487667" y="1639062"/>
             <a:ext cx="3169840" cy="356616"/>
           </a:xfrm>
           <a:prstGeom prst="rect">
@@ -9404,7 +9522,7 @@
           <a:p>
             <a:pPr algn="l"/>
             <a:r>
-              <a:rPr sz="750" b="0">
+              <a:rPr sz="800" b="0">
                 <a:solidFill>
                   <a:srgbClr val="1A1A1A"/>
                 </a:solidFill>
@@ -9417,13 +9535,13 @@
       </p:sp>
       <p:sp>
         <p:nvSpPr>
-          <p:cNvPr id="11" name="Rectangle 10"/>
+          <p:cNvPr id="12" name="Rectangle 11"/>
           <p:cNvSpPr/>
           <p:nvPr/>
         </p:nvSpPr>
         <p:spPr>
           <a:xfrm>
-            <a:off x="3535591" y="1268730"/>
+            <a:off x="3657508" y="1611630"/>
             <a:ext cx="4145176" cy="411480"/>
           </a:xfrm>
           <a:prstGeom prst="rect">
@@ -9463,13 +9581,13 @@
       </p:sp>
       <p:sp>
         <p:nvSpPr>
-          <p:cNvPr id="12" name="TextBox 11"/>
-          <p:cNvSpPr txBox="1"/>
-          <p:nvPr/>
-        </p:nvSpPr>
-        <p:spPr>
-          <a:xfrm>
-            <a:off x="3535591" y="1296161"/>
+          <p:cNvPr id="13" name="TextBox 12"/>
+          <p:cNvSpPr txBox="1"/>
+          <p:nvPr/>
+        </p:nvSpPr>
+        <p:spPr>
+          <a:xfrm>
+            <a:off x="3657508" y="1639062"/>
             <a:ext cx="4145176" cy="356616"/>
           </a:xfrm>
           <a:prstGeom prst="rect">
@@ -9485,7 +9603,7 @@
           <a:p>
             <a:pPr algn="l"/>
             <a:r>
-              <a:rPr sz="750" b="0">
+              <a:rPr sz="800" b="0">
                 <a:solidFill>
                   <a:srgbClr val="1A1A1A"/>
                 </a:solidFill>
@@ -9498,13 +9616,13 @@
       </p:sp>
       <p:sp>
         <p:nvSpPr>
-          <p:cNvPr id="13" name="Rectangle 12"/>
+          <p:cNvPr id="14" name="Rectangle 13"/>
           <p:cNvSpPr/>
           <p:nvPr/>
         </p:nvSpPr>
         <p:spPr>
           <a:xfrm>
-            <a:off x="7680767" y="1268730"/>
+            <a:off x="7802684" y="1611630"/>
             <a:ext cx="4145176" cy="411480"/>
           </a:xfrm>
           <a:prstGeom prst="rect">
@@ -9544,13 +9662,13 @@
       </p:sp>
       <p:sp>
         <p:nvSpPr>
-          <p:cNvPr id="14" name="TextBox 13"/>
-          <p:cNvSpPr txBox="1"/>
-          <p:nvPr/>
-        </p:nvSpPr>
-        <p:spPr>
-          <a:xfrm>
-            <a:off x="7680767" y="1296161"/>
+          <p:cNvPr id="15" name="TextBox 14"/>
+          <p:cNvSpPr txBox="1"/>
+          <p:nvPr/>
+        </p:nvSpPr>
+        <p:spPr>
+          <a:xfrm>
+            <a:off x="7802684" y="1639062"/>
             <a:ext cx="4145176" cy="356616"/>
           </a:xfrm>
           <a:prstGeom prst="rect">
@@ -9566,7 +9684,7 @@
           <a:p>
             <a:pPr algn="l"/>
             <a:r>
-              <a:rPr sz="750" b="0">
+              <a:rPr sz="800" b="0">
                 <a:solidFill>
                   <a:srgbClr val="1A1A1A"/>
                 </a:solidFill>
@@ -9579,13 +9697,13 @@
       </p:sp>
       <p:sp>
         <p:nvSpPr>
-          <p:cNvPr id="15" name="Rectangle 14"/>
+          <p:cNvPr id="16" name="Rectangle 15"/>
           <p:cNvSpPr/>
           <p:nvPr/>
         </p:nvSpPr>
         <p:spPr>
           <a:xfrm>
-            <a:off x="365750" y="1680210"/>
+            <a:off x="487667" y="2023110"/>
             <a:ext cx="3169840" cy="411480"/>
           </a:xfrm>
           <a:prstGeom prst="rect">
@@ -9625,13 +9743,13 @@
       </p:sp>
       <p:sp>
         <p:nvSpPr>
-          <p:cNvPr id="16" name="TextBox 15"/>
-          <p:cNvSpPr txBox="1"/>
-          <p:nvPr/>
-        </p:nvSpPr>
-        <p:spPr>
-          <a:xfrm>
-            <a:off x="365750" y="1707642"/>
+          <p:cNvPr id="17" name="TextBox 16"/>
+          <p:cNvSpPr txBox="1"/>
+          <p:nvPr/>
+        </p:nvSpPr>
+        <p:spPr>
+          <a:xfrm>
+            <a:off x="487667" y="2050542"/>
             <a:ext cx="3169840" cy="356616"/>
           </a:xfrm>
           <a:prstGeom prst="rect">
@@ -9647,7 +9765,7 @@
           <a:p>
             <a:pPr algn="l"/>
             <a:r>
-              <a:rPr sz="750" b="0">
+              <a:rPr sz="800" b="0">
                 <a:solidFill>
                   <a:srgbClr val="1A1A1A"/>
                 </a:solidFill>
@@ -9660,13 +9778,13 @@
       </p:sp>
       <p:sp>
         <p:nvSpPr>
-          <p:cNvPr id="17" name="Rectangle 16"/>
+          <p:cNvPr id="18" name="Rectangle 17"/>
           <p:cNvSpPr/>
           <p:nvPr/>
         </p:nvSpPr>
         <p:spPr>
           <a:xfrm>
-            <a:off x="3535591" y="1680210"/>
+            <a:off x="3657508" y="2023110"/>
             <a:ext cx="4145176" cy="411480"/>
           </a:xfrm>
           <a:prstGeom prst="rect">
@@ -9706,13 +9824,13 @@
       </p:sp>
       <p:sp>
         <p:nvSpPr>
-          <p:cNvPr id="18" name="TextBox 17"/>
-          <p:cNvSpPr txBox="1"/>
-          <p:nvPr/>
-        </p:nvSpPr>
-        <p:spPr>
-          <a:xfrm>
-            <a:off x="3535591" y="1707642"/>
+          <p:cNvPr id="19" name="TextBox 18"/>
+          <p:cNvSpPr txBox="1"/>
+          <p:nvPr/>
+        </p:nvSpPr>
+        <p:spPr>
+          <a:xfrm>
+            <a:off x="3657508" y="2050542"/>
             <a:ext cx="4145176" cy="356616"/>
           </a:xfrm>
           <a:prstGeom prst="rect">
@@ -9728,7 +9846,7 @@
           <a:p>
             <a:pPr algn="l"/>
             <a:r>
-              <a:rPr sz="750" b="0">
+              <a:rPr sz="800" b="0">
                 <a:solidFill>
                   <a:srgbClr val="1A1A1A"/>
                 </a:solidFill>
@@ -9741,13 +9859,13 @@
       </p:sp>
       <p:sp>
         <p:nvSpPr>
-          <p:cNvPr id="19" name="Rectangle 18"/>
+          <p:cNvPr id="20" name="Rectangle 19"/>
           <p:cNvSpPr/>
           <p:nvPr/>
         </p:nvSpPr>
         <p:spPr>
           <a:xfrm>
-            <a:off x="7680767" y="1680210"/>
+            <a:off x="7802684" y="2023110"/>
             <a:ext cx="4145176" cy="411480"/>
           </a:xfrm>
           <a:prstGeom prst="rect">
@@ -9787,13 +9905,13 @@
       </p:sp>
       <p:sp>
         <p:nvSpPr>
-          <p:cNvPr id="20" name="TextBox 19"/>
-          <p:cNvSpPr txBox="1"/>
-          <p:nvPr/>
-        </p:nvSpPr>
-        <p:spPr>
-          <a:xfrm>
-            <a:off x="7680767" y="1707642"/>
+          <p:cNvPr id="21" name="TextBox 20"/>
+          <p:cNvSpPr txBox="1"/>
+          <p:nvPr/>
+        </p:nvSpPr>
+        <p:spPr>
+          <a:xfrm>
+            <a:off x="7802684" y="2050542"/>
             <a:ext cx="4145176" cy="356616"/>
           </a:xfrm>
           <a:prstGeom prst="rect">
@@ -9809,7 +9927,7 @@
           <a:p>
             <a:pPr algn="l"/>
             <a:r>
-              <a:rPr sz="750" b="0">
+              <a:rPr sz="800" b="0">
                 <a:solidFill>
                   <a:srgbClr val="1A1A1A"/>
                 </a:solidFill>
@@ -9822,13 +9940,13 @@
       </p:sp>
       <p:sp>
         <p:nvSpPr>
-          <p:cNvPr id="21" name="Rectangle 20"/>
+          <p:cNvPr id="22" name="Rectangle 21"/>
           <p:cNvSpPr/>
           <p:nvPr/>
         </p:nvSpPr>
         <p:spPr>
           <a:xfrm>
-            <a:off x="365750" y="2091690"/>
+            <a:off x="487667" y="2434590"/>
             <a:ext cx="3169840" cy="534924"/>
           </a:xfrm>
           <a:prstGeom prst="rect">
@@ -9868,13 +9986,13 @@
       </p:sp>
       <p:sp>
         <p:nvSpPr>
-          <p:cNvPr id="22" name="TextBox 21"/>
-          <p:cNvSpPr txBox="1"/>
-          <p:nvPr/>
-        </p:nvSpPr>
-        <p:spPr>
-          <a:xfrm>
-            <a:off x="365750" y="2119122"/>
+          <p:cNvPr id="23" name="TextBox 22"/>
+          <p:cNvSpPr txBox="1"/>
+          <p:nvPr/>
+        </p:nvSpPr>
+        <p:spPr>
+          <a:xfrm>
+            <a:off x="487667" y="2462022"/>
             <a:ext cx="3169840" cy="480060"/>
           </a:xfrm>
           <a:prstGeom prst="rect">
@@ -9890,7 +10008,7 @@
           <a:p>
             <a:pPr algn="l"/>
             <a:r>
-              <a:rPr sz="750" b="0">
+              <a:rPr sz="800" b="0">
                 <a:solidFill>
                   <a:srgbClr val="1A1A1A"/>
                 </a:solidFill>
@@ -9903,13 +10021,13 @@
       </p:sp>
       <p:sp>
         <p:nvSpPr>
-          <p:cNvPr id="23" name="Rectangle 22"/>
+          <p:cNvPr id="24" name="Rectangle 23"/>
           <p:cNvSpPr/>
           <p:nvPr/>
         </p:nvSpPr>
         <p:spPr>
           <a:xfrm>
-            <a:off x="3535591" y="2091690"/>
+            <a:off x="3657508" y="2434590"/>
             <a:ext cx="4145176" cy="534924"/>
           </a:xfrm>
           <a:prstGeom prst="rect">
@@ -9949,13 +10067,13 @@
       </p:sp>
       <p:sp>
         <p:nvSpPr>
-          <p:cNvPr id="24" name="TextBox 23"/>
-          <p:cNvSpPr txBox="1"/>
-          <p:nvPr/>
-        </p:nvSpPr>
-        <p:spPr>
-          <a:xfrm>
-            <a:off x="3535591" y="2119122"/>
+          <p:cNvPr id="25" name="TextBox 24"/>
+          <p:cNvSpPr txBox="1"/>
+          <p:nvPr/>
+        </p:nvSpPr>
+        <p:spPr>
+          <a:xfrm>
+            <a:off x="3657508" y="2462022"/>
             <a:ext cx="4145176" cy="480060"/>
           </a:xfrm>
           <a:prstGeom prst="rect">
@@ -9971,7 +10089,7 @@
           <a:p>
             <a:pPr algn="l"/>
             <a:r>
-              <a:rPr sz="750" b="0">
+              <a:rPr sz="800" b="0">
                 <a:solidFill>
                   <a:srgbClr val="1A1A1A"/>
                 </a:solidFill>
@@ -9984,13 +10102,13 @@
       </p:sp>
       <p:sp>
         <p:nvSpPr>
-          <p:cNvPr id="25" name="Rectangle 24"/>
+          <p:cNvPr id="26" name="Rectangle 25"/>
           <p:cNvSpPr/>
           <p:nvPr/>
         </p:nvSpPr>
         <p:spPr>
           <a:xfrm>
-            <a:off x="7680767" y="2091690"/>
+            <a:off x="7802684" y="2434590"/>
             <a:ext cx="4145176" cy="534924"/>
           </a:xfrm>
           <a:prstGeom prst="rect">
@@ -10030,13 +10148,13 @@
       </p:sp>
       <p:sp>
         <p:nvSpPr>
-          <p:cNvPr id="26" name="TextBox 25"/>
-          <p:cNvSpPr txBox="1"/>
-          <p:nvPr/>
-        </p:nvSpPr>
-        <p:spPr>
-          <a:xfrm>
-            <a:off x="7680767" y="2119122"/>
+          <p:cNvPr id="27" name="TextBox 26"/>
+          <p:cNvSpPr txBox="1"/>
+          <p:nvPr/>
+        </p:nvSpPr>
+        <p:spPr>
+          <a:xfrm>
+            <a:off x="7802684" y="2462022"/>
             <a:ext cx="4145176" cy="480060"/>
           </a:xfrm>
           <a:prstGeom prst="rect">
@@ -10052,7 +10170,7 @@
           <a:p>
             <a:pPr algn="l"/>
             <a:r>
-              <a:rPr sz="750" b="0">
+              <a:rPr sz="800" b="0">
                 <a:solidFill>
                   <a:srgbClr val="1A1A1A"/>
                 </a:solidFill>
@@ -10065,13 +10183,13 @@
       </p:sp>
       <p:sp>
         <p:nvSpPr>
-          <p:cNvPr id="27" name="Rectangle 26"/>
+          <p:cNvPr id="28" name="Rectangle 27"/>
           <p:cNvSpPr/>
           <p:nvPr/>
         </p:nvSpPr>
         <p:spPr>
           <a:xfrm>
-            <a:off x="365750" y="2626613"/>
+            <a:off x="487667" y="2969514"/>
             <a:ext cx="3169840" cy="534924"/>
           </a:xfrm>
           <a:prstGeom prst="rect">
@@ -10111,13 +10229,13 @@
       </p:sp>
       <p:sp>
         <p:nvSpPr>
-          <p:cNvPr id="28" name="TextBox 27"/>
-          <p:cNvSpPr txBox="1"/>
-          <p:nvPr/>
-        </p:nvSpPr>
-        <p:spPr>
-          <a:xfrm>
-            <a:off x="365750" y="2654045"/>
+          <p:cNvPr id="29" name="TextBox 28"/>
+          <p:cNvSpPr txBox="1"/>
+          <p:nvPr/>
+        </p:nvSpPr>
+        <p:spPr>
+          <a:xfrm>
+            <a:off x="487667" y="2996946"/>
             <a:ext cx="3169840" cy="480060"/>
           </a:xfrm>
           <a:prstGeom prst="rect">
@@ -10133,7 +10251,7 @@
           <a:p>
             <a:pPr algn="l"/>
             <a:r>
-              <a:rPr sz="750" b="0">
+              <a:rPr sz="800" b="0">
                 <a:solidFill>
                   <a:srgbClr val="1A1A1A"/>
                 </a:solidFill>
@@ -10146,13 +10264,13 @@
       </p:sp>
       <p:sp>
         <p:nvSpPr>
-          <p:cNvPr id="29" name="Rectangle 28"/>
+          <p:cNvPr id="30" name="Rectangle 29"/>
           <p:cNvSpPr/>
           <p:nvPr/>
         </p:nvSpPr>
         <p:spPr>
           <a:xfrm>
-            <a:off x="3535591" y="2626613"/>
+            <a:off x="3657508" y="2969514"/>
             <a:ext cx="4145176" cy="534924"/>
           </a:xfrm>
           <a:prstGeom prst="rect">
@@ -10192,13 +10310,13 @@
       </p:sp>
       <p:sp>
         <p:nvSpPr>
-          <p:cNvPr id="30" name="TextBox 29"/>
-          <p:cNvSpPr txBox="1"/>
-          <p:nvPr/>
-        </p:nvSpPr>
-        <p:spPr>
-          <a:xfrm>
-            <a:off x="3535591" y="2654045"/>
+          <p:cNvPr id="31" name="TextBox 30"/>
+          <p:cNvSpPr txBox="1"/>
+          <p:nvPr/>
+        </p:nvSpPr>
+        <p:spPr>
+          <a:xfrm>
+            <a:off x="3657508" y="2996946"/>
             <a:ext cx="4145176" cy="480060"/>
           </a:xfrm>
           <a:prstGeom prst="rect">
@@ -10214,7 +10332,7 @@
           <a:p>
             <a:pPr algn="l"/>
             <a:r>
-              <a:rPr sz="750" b="0">
+              <a:rPr sz="800" b="0">
                 <a:solidFill>
                   <a:srgbClr val="1A1A1A"/>
                 </a:solidFill>
@@ -10227,13 +10345,13 @@
       </p:sp>
       <p:sp>
         <p:nvSpPr>
-          <p:cNvPr id="31" name="Rectangle 30"/>
+          <p:cNvPr id="32" name="Rectangle 31"/>
           <p:cNvSpPr/>
           <p:nvPr/>
         </p:nvSpPr>
         <p:spPr>
           <a:xfrm>
-            <a:off x="7680767" y="2626613"/>
+            <a:off x="7802684" y="2969514"/>
             <a:ext cx="4145176" cy="534924"/>
           </a:xfrm>
           <a:prstGeom prst="rect">
@@ -10273,13 +10391,13 @@
       </p:sp>
       <p:sp>
         <p:nvSpPr>
-          <p:cNvPr id="32" name="TextBox 31"/>
-          <p:cNvSpPr txBox="1"/>
-          <p:nvPr/>
-        </p:nvSpPr>
-        <p:spPr>
-          <a:xfrm>
-            <a:off x="7680767" y="2654045"/>
+          <p:cNvPr id="33" name="TextBox 32"/>
+          <p:cNvSpPr txBox="1"/>
+          <p:nvPr/>
+        </p:nvSpPr>
+        <p:spPr>
+          <a:xfrm>
+            <a:off x="7802684" y="2996946"/>
             <a:ext cx="4145176" cy="480060"/>
           </a:xfrm>
           <a:prstGeom prst="rect">
@@ -10295,7 +10413,7 @@
           <a:p>
             <a:pPr algn="l"/>
             <a:r>
-              <a:rPr sz="750" b="0">
+              <a:rPr sz="800" b="0">
                 <a:solidFill>
                   <a:srgbClr val="1A1A1A"/>
                 </a:solidFill>
@@ -10308,13 +10426,13 @@
       </p:sp>
       <p:sp>
         <p:nvSpPr>
-          <p:cNvPr id="33" name="Rectangle 32"/>
+          <p:cNvPr id="34" name="Rectangle 33"/>
           <p:cNvSpPr/>
           <p:nvPr/>
         </p:nvSpPr>
         <p:spPr>
           <a:xfrm>
-            <a:off x="365750" y="3161537"/>
+            <a:off x="487667" y="3504437"/>
             <a:ext cx="3169840" cy="411480"/>
           </a:xfrm>
           <a:prstGeom prst="rect">
@@ -10354,13 +10472,13 @@
       </p:sp>
       <p:sp>
         <p:nvSpPr>
-          <p:cNvPr id="34" name="TextBox 33"/>
-          <p:cNvSpPr txBox="1"/>
-          <p:nvPr/>
-        </p:nvSpPr>
-        <p:spPr>
-          <a:xfrm>
-            <a:off x="365750" y="3188969"/>
+          <p:cNvPr id="35" name="TextBox 34"/>
+          <p:cNvSpPr txBox="1"/>
+          <p:nvPr/>
+        </p:nvSpPr>
+        <p:spPr>
+          <a:xfrm>
+            <a:off x="487667" y="3531869"/>
             <a:ext cx="3169840" cy="356616"/>
           </a:xfrm>
           <a:prstGeom prst="rect">
@@ -10376,7 +10494,7 @@
           <a:p>
             <a:pPr algn="l"/>
             <a:r>
-              <a:rPr sz="750" b="0">
+              <a:rPr sz="800" b="0">
                 <a:solidFill>
                   <a:srgbClr val="1A1A1A"/>
                 </a:solidFill>
@@ -10389,13 +10507,13 @@
       </p:sp>
       <p:sp>
         <p:nvSpPr>
-          <p:cNvPr id="35" name="Rectangle 34"/>
+          <p:cNvPr id="36" name="Rectangle 35"/>
           <p:cNvSpPr/>
           <p:nvPr/>
         </p:nvSpPr>
         <p:spPr>
           <a:xfrm>
-            <a:off x="3535591" y="3161537"/>
+            <a:off x="3657508" y="3504437"/>
             <a:ext cx="4145176" cy="411480"/>
           </a:xfrm>
           <a:prstGeom prst="rect">
@@ -10435,13 +10553,13 @@
       </p:sp>
       <p:sp>
         <p:nvSpPr>
-          <p:cNvPr id="36" name="TextBox 35"/>
-          <p:cNvSpPr txBox="1"/>
-          <p:nvPr/>
-        </p:nvSpPr>
-        <p:spPr>
-          <a:xfrm>
-            <a:off x="3535591" y="3188969"/>
+          <p:cNvPr id="37" name="TextBox 36"/>
+          <p:cNvSpPr txBox="1"/>
+          <p:nvPr/>
+        </p:nvSpPr>
+        <p:spPr>
+          <a:xfrm>
+            <a:off x="3657508" y="3531869"/>
             <a:ext cx="4145176" cy="356616"/>
           </a:xfrm>
           <a:prstGeom prst="rect">
@@ -10457,7 +10575,7 @@
           <a:p>
             <a:pPr algn="l"/>
             <a:r>
-              <a:rPr sz="750" b="0">
+              <a:rPr sz="800" b="0">
                 <a:solidFill>
                   <a:srgbClr val="1A1A1A"/>
                 </a:solidFill>
@@ -10470,13 +10588,13 @@
       </p:sp>
       <p:sp>
         <p:nvSpPr>
-          <p:cNvPr id="37" name="Rectangle 36"/>
+          <p:cNvPr id="38" name="Rectangle 37"/>
           <p:cNvSpPr/>
           <p:nvPr/>
         </p:nvSpPr>
         <p:spPr>
           <a:xfrm>
-            <a:off x="7680767" y="3161537"/>
+            <a:off x="7802684" y="3504437"/>
             <a:ext cx="4145176" cy="411480"/>
           </a:xfrm>
           <a:prstGeom prst="rect">
@@ -10516,13 +10634,13 @@
       </p:sp>
       <p:sp>
         <p:nvSpPr>
-          <p:cNvPr id="38" name="TextBox 37"/>
-          <p:cNvSpPr txBox="1"/>
-          <p:nvPr/>
-        </p:nvSpPr>
-        <p:spPr>
-          <a:xfrm>
-            <a:off x="7680767" y="3188969"/>
+          <p:cNvPr id="39" name="TextBox 38"/>
+          <p:cNvSpPr txBox="1"/>
+          <p:nvPr/>
+        </p:nvSpPr>
+        <p:spPr>
+          <a:xfrm>
+            <a:off x="7802684" y="3531869"/>
             <a:ext cx="4145176" cy="356616"/>
           </a:xfrm>
           <a:prstGeom prst="rect">
@@ -10538,7 +10656,7 @@
           <a:p>
             <a:pPr algn="l"/>
             <a:r>
-              <a:rPr sz="750" b="0">
+              <a:rPr sz="800" b="0">
                 <a:solidFill>
                   <a:srgbClr val="1A1A1A"/>
                 </a:solidFill>
@@ -10551,7 +10669,7 @@
       </p:sp>
       <p:sp>
         <p:nvSpPr>
-          <p:cNvPr id="39" name="TextBox 38"/>
+          <p:cNvPr id="40" name="TextBox 39"/>
           <p:cNvSpPr txBox="1"/>
           <p:nvPr/>
         </p:nvSpPr>
@@ -10586,7 +10704,7 @@
       </p:sp>
       <p:sp>
         <p:nvSpPr>
-          <p:cNvPr id="40" name="TextBox 39"/>
+          <p:cNvPr id="41" name="TextBox 40"/>
           <p:cNvSpPr txBox="1"/>
           <p:nvPr/>
         </p:nvSpPr>
@@ -10645,42 +10763,112 @@
         </p:nvSpPr>
         <p:spPr>
           <a:xfrm>
-            <a:off x="365750" y="274320"/>
-            <a:ext cx="10972525" cy="480060"/>
-          </a:xfrm>
-          <a:prstGeom prst="rect">
-            <a:avLst/>
-          </a:prstGeom>
-          <a:noFill/>
-        </p:spPr>
-        <p:txBody>
-          <a:bodyPr wrap="square" lIns="36000" rIns="36000" tIns="18000" bIns="18000">
-            <a:spAutoFit/>
-          </a:bodyPr>
-          <a:lstStyle/>
-          <a:p>
-            <a:pPr algn="l"/>
-            <a:r>
-              <a:rPr sz="1700" b="1">
+            <a:off x="487667" y="137160"/>
+            <a:ext cx="7315017" cy="274320"/>
+          </a:xfrm>
+          <a:prstGeom prst="rect">
+            <a:avLst/>
+          </a:prstGeom>
+          <a:noFill/>
+        </p:spPr>
+        <p:txBody>
+          <a:bodyPr wrap="square" lIns="36000" rIns="36000" tIns="18000" bIns="18000">
+            <a:spAutoFit/>
+          </a:bodyPr>
+          <a:lstStyle/>
+          <a:p>
+            <a:pPr algn="l"/>
+            <a:r>
+              <a:rPr sz="900" b="0">
+                <a:solidFill>
+                  <a:srgbClr val="767676"/>
+                </a:solidFill>
+                <a:latin typeface="Pretendard"/>
+              </a:rPr>
+              <a:t>디자인 시안전략</a:t>
+            </a:r>
+          </a:p>
+        </p:txBody>
+      </p:sp>
+      <p:sp>
+        <p:nvSpPr>
+          <p:cNvPr id="3" name="TextBox 2"/>
+          <p:cNvSpPr txBox="1"/>
+          <p:nvPr/>
+        </p:nvSpPr>
+        <p:spPr>
+          <a:xfrm>
+            <a:off x="487667" y="548640"/>
+            <a:ext cx="11216359" cy="548640"/>
+          </a:xfrm>
+          <a:prstGeom prst="rect">
+            <a:avLst/>
+          </a:prstGeom>
+          <a:noFill/>
+        </p:spPr>
+        <p:txBody>
+          <a:bodyPr wrap="square" lIns="36000" rIns="36000" tIns="18000" bIns="18000">
+            <a:spAutoFit/>
+          </a:bodyPr>
+          <a:lstStyle/>
+          <a:p>
+            <a:pPr algn="l"/>
+            <a:r>
+              <a:rPr sz="2400" b="1">
                 <a:solidFill>
                   <a:srgbClr val="1A1A1A"/>
                 </a:solidFill>
                 <a:latin typeface="Pretendard"/>
               </a:rPr>
-              <a:t>6. 게이트 — 픽셀이 아니라 방향을 승인받는다</a:t>
-            </a:r>
-          </a:p>
-        </p:txBody>
-      </p:sp>
-      <p:sp>
-        <p:nvSpPr>
-          <p:cNvPr id="3" name="Rectangle 2"/>
+              <a:t>게이트</a:t>
+            </a:r>
+          </a:p>
+        </p:txBody>
+      </p:sp>
+      <p:sp>
+        <p:nvSpPr>
+          <p:cNvPr id="4" name="TextBox 3"/>
+          <p:cNvSpPr txBox="1"/>
+          <p:nvPr/>
+        </p:nvSpPr>
+        <p:spPr>
+          <a:xfrm>
+            <a:off x="487667" y="1097280"/>
+            <a:ext cx="11216359" cy="377190"/>
+          </a:xfrm>
+          <a:prstGeom prst="rect">
+            <a:avLst/>
+          </a:prstGeom>
+          <a:noFill/>
+        </p:spPr>
+        <p:txBody>
+          <a:bodyPr wrap="square" lIns="36000" rIns="36000" tIns="18000" bIns="18000">
+            <a:spAutoFit/>
+          </a:bodyPr>
+          <a:lstStyle/>
+          <a:p>
+            <a:pPr algn="l"/>
+            <a:r>
+              <a:rPr sz="1200" b="0">
+                <a:solidFill>
+                  <a:srgbClr val="767676"/>
+                </a:solidFill>
+                <a:latin typeface="Pretendard"/>
+              </a:rPr>
+              <a:t>픽셀이 아니라 방향을 승인받는다</a:t>
+            </a:r>
+          </a:p>
+        </p:txBody>
+      </p:sp>
+      <p:sp>
+        <p:nvSpPr>
+          <p:cNvPr id="5" name="Rectangle 4"/>
           <p:cNvSpPr/>
           <p:nvPr/>
         </p:nvSpPr>
         <p:spPr>
           <a:xfrm>
-            <a:off x="365750" y="891540"/>
+            <a:off x="487667" y="1577340"/>
             <a:ext cx="2804089" cy="377190"/>
           </a:xfrm>
           <a:prstGeom prst="rect">
@@ -10720,13 +10908,13 @@
       </p:sp>
       <p:sp>
         <p:nvSpPr>
-          <p:cNvPr id="4" name="TextBox 3"/>
-          <p:cNvSpPr txBox="1"/>
-          <p:nvPr/>
-        </p:nvSpPr>
-        <p:spPr>
-          <a:xfrm>
-            <a:off x="365750" y="946404"/>
+          <p:cNvPr id="6" name="TextBox 5"/>
+          <p:cNvSpPr txBox="1"/>
+          <p:nvPr/>
+        </p:nvSpPr>
+        <p:spPr>
+          <a:xfrm>
+            <a:off x="487667" y="1632204"/>
             <a:ext cx="2804089" cy="301752"/>
           </a:xfrm>
           <a:prstGeom prst="rect">
@@ -10755,13 +10943,13 @@
       </p:sp>
       <p:sp>
         <p:nvSpPr>
-          <p:cNvPr id="5" name="Rectangle 4"/>
+          <p:cNvPr id="7" name="Rectangle 6"/>
           <p:cNvSpPr/>
           <p:nvPr/>
         </p:nvSpPr>
         <p:spPr>
           <a:xfrm>
-            <a:off x="3169840" y="891540"/>
+            <a:off x="3291757" y="1577340"/>
             <a:ext cx="2804089" cy="377190"/>
           </a:xfrm>
           <a:prstGeom prst="rect">
@@ -10801,13 +10989,13 @@
       </p:sp>
       <p:sp>
         <p:nvSpPr>
-          <p:cNvPr id="6" name="TextBox 5"/>
-          <p:cNvSpPr txBox="1"/>
-          <p:nvPr/>
-        </p:nvSpPr>
-        <p:spPr>
-          <a:xfrm>
-            <a:off x="3169840" y="946404"/>
+          <p:cNvPr id="8" name="TextBox 7"/>
+          <p:cNvSpPr txBox="1"/>
+          <p:nvPr/>
+        </p:nvSpPr>
+        <p:spPr>
+          <a:xfrm>
+            <a:off x="3291757" y="1632204"/>
             <a:ext cx="2804089" cy="301752"/>
           </a:xfrm>
           <a:prstGeom prst="rect">
@@ -10836,13 +11024,13 @@
       </p:sp>
       <p:sp>
         <p:nvSpPr>
-          <p:cNvPr id="7" name="Rectangle 6"/>
+          <p:cNvPr id="9" name="Rectangle 8"/>
           <p:cNvSpPr/>
           <p:nvPr/>
         </p:nvSpPr>
         <p:spPr>
           <a:xfrm>
-            <a:off x="5973930" y="891540"/>
+            <a:off x="6095847" y="1577340"/>
             <a:ext cx="2804089" cy="377190"/>
           </a:xfrm>
           <a:prstGeom prst="rect">
@@ -10882,13 +11070,13 @@
       </p:sp>
       <p:sp>
         <p:nvSpPr>
-          <p:cNvPr id="8" name="TextBox 7"/>
-          <p:cNvSpPr txBox="1"/>
-          <p:nvPr/>
-        </p:nvSpPr>
-        <p:spPr>
-          <a:xfrm>
-            <a:off x="5973930" y="946404"/>
+          <p:cNvPr id="10" name="TextBox 9"/>
+          <p:cNvSpPr txBox="1"/>
+          <p:nvPr/>
+        </p:nvSpPr>
+        <p:spPr>
+          <a:xfrm>
+            <a:off x="6095847" y="1632204"/>
             <a:ext cx="2804089" cy="301752"/>
           </a:xfrm>
           <a:prstGeom prst="rect">
@@ -10917,13 +11105,13 @@
       </p:sp>
       <p:sp>
         <p:nvSpPr>
-          <p:cNvPr id="9" name="Rectangle 8"/>
+          <p:cNvPr id="11" name="Rectangle 10"/>
           <p:cNvSpPr/>
           <p:nvPr/>
         </p:nvSpPr>
         <p:spPr>
           <a:xfrm>
-            <a:off x="8778020" y="891540"/>
+            <a:off x="8899937" y="1577340"/>
             <a:ext cx="2804089" cy="377190"/>
           </a:xfrm>
           <a:prstGeom prst="rect">
@@ -10963,13 +11151,13 @@
       </p:sp>
       <p:sp>
         <p:nvSpPr>
-          <p:cNvPr id="10" name="TextBox 9"/>
-          <p:cNvSpPr txBox="1"/>
-          <p:nvPr/>
-        </p:nvSpPr>
-        <p:spPr>
-          <a:xfrm>
-            <a:off x="8778020" y="946404"/>
+          <p:cNvPr id="12" name="TextBox 11"/>
+          <p:cNvSpPr txBox="1"/>
+          <p:nvPr/>
+        </p:nvSpPr>
+        <p:spPr>
+          <a:xfrm>
+            <a:off x="8899937" y="1632204"/>
             <a:ext cx="2804089" cy="301752"/>
           </a:xfrm>
           <a:prstGeom prst="rect">
@@ -10998,13 +11186,13 @@
       </p:sp>
       <p:sp>
         <p:nvSpPr>
-          <p:cNvPr id="11" name="Rectangle 10"/>
+          <p:cNvPr id="13" name="Rectangle 12"/>
           <p:cNvSpPr/>
           <p:nvPr/>
         </p:nvSpPr>
         <p:spPr>
           <a:xfrm>
-            <a:off x="365750" y="1268730"/>
+            <a:off x="487667" y="1954530"/>
             <a:ext cx="2804089" cy="411480"/>
           </a:xfrm>
           <a:prstGeom prst="rect">
@@ -11044,13 +11232,13 @@
       </p:sp>
       <p:sp>
         <p:nvSpPr>
-          <p:cNvPr id="12" name="TextBox 11"/>
-          <p:cNvSpPr txBox="1"/>
-          <p:nvPr/>
-        </p:nvSpPr>
-        <p:spPr>
-          <a:xfrm>
-            <a:off x="365750" y="1296161"/>
+          <p:cNvPr id="14" name="TextBox 13"/>
+          <p:cNvSpPr txBox="1"/>
+          <p:nvPr/>
+        </p:nvSpPr>
+        <p:spPr>
+          <a:xfrm>
+            <a:off x="487667" y="1981962"/>
             <a:ext cx="2804089" cy="356616"/>
           </a:xfrm>
           <a:prstGeom prst="rect">
@@ -11066,7 +11254,7 @@
           <a:p>
             <a:pPr algn="l"/>
             <a:r>
-              <a:rPr sz="750" b="0">
+              <a:rPr sz="800" b="0">
                 <a:solidFill>
                   <a:srgbClr val="1A1A1A"/>
                 </a:solidFill>
@@ -11079,13 +11267,13 @@
       </p:sp>
       <p:sp>
         <p:nvSpPr>
-          <p:cNvPr id="13" name="Rectangle 12"/>
+          <p:cNvPr id="15" name="Rectangle 14"/>
           <p:cNvSpPr/>
           <p:nvPr/>
         </p:nvSpPr>
         <p:spPr>
           <a:xfrm>
-            <a:off x="3169840" y="1268730"/>
+            <a:off x="3291757" y="1954530"/>
             <a:ext cx="2804089" cy="411480"/>
           </a:xfrm>
           <a:prstGeom prst="rect">
@@ -11125,13 +11313,13 @@
       </p:sp>
       <p:sp>
         <p:nvSpPr>
-          <p:cNvPr id="14" name="TextBox 13"/>
-          <p:cNvSpPr txBox="1"/>
-          <p:nvPr/>
-        </p:nvSpPr>
-        <p:spPr>
-          <a:xfrm>
-            <a:off x="3169840" y="1296161"/>
+          <p:cNvPr id="16" name="TextBox 15"/>
+          <p:cNvSpPr txBox="1"/>
+          <p:nvPr/>
+        </p:nvSpPr>
+        <p:spPr>
+          <a:xfrm>
+            <a:off x="3291757" y="1981962"/>
             <a:ext cx="2804089" cy="356616"/>
           </a:xfrm>
           <a:prstGeom prst="rect">
@@ -11147,7 +11335,7 @@
           <a:p>
             <a:pPr algn="l"/>
             <a:r>
-              <a:rPr sz="750" b="0">
+              <a:rPr sz="800" b="0">
                 <a:solidFill>
                   <a:srgbClr val="1A1A1A"/>
                 </a:solidFill>
@@ -11160,13 +11348,13 @@
       </p:sp>
       <p:sp>
         <p:nvSpPr>
-          <p:cNvPr id="15" name="Rectangle 14"/>
+          <p:cNvPr id="17" name="Rectangle 16"/>
           <p:cNvSpPr/>
           <p:nvPr/>
         </p:nvSpPr>
         <p:spPr>
           <a:xfrm>
-            <a:off x="5973930" y="1268730"/>
+            <a:off x="6095847" y="1954530"/>
             <a:ext cx="2804089" cy="411480"/>
           </a:xfrm>
           <a:prstGeom prst="rect">
@@ -11206,13 +11394,13 @@
       </p:sp>
       <p:sp>
         <p:nvSpPr>
-          <p:cNvPr id="16" name="TextBox 15"/>
-          <p:cNvSpPr txBox="1"/>
-          <p:nvPr/>
-        </p:nvSpPr>
-        <p:spPr>
-          <a:xfrm>
-            <a:off x="5973930" y="1296161"/>
+          <p:cNvPr id="18" name="TextBox 17"/>
+          <p:cNvSpPr txBox="1"/>
+          <p:nvPr/>
+        </p:nvSpPr>
+        <p:spPr>
+          <a:xfrm>
+            <a:off x="6095847" y="1981962"/>
             <a:ext cx="2804089" cy="356616"/>
           </a:xfrm>
           <a:prstGeom prst="rect">
@@ -11228,7 +11416,7 @@
           <a:p>
             <a:pPr algn="l"/>
             <a:r>
-              <a:rPr sz="750" b="0">
+              <a:rPr sz="800" b="0">
                 <a:solidFill>
                   <a:srgbClr val="1A1A1A"/>
                 </a:solidFill>
@@ -11241,13 +11429,13 @@
       </p:sp>
       <p:sp>
         <p:nvSpPr>
-          <p:cNvPr id="17" name="Rectangle 16"/>
+          <p:cNvPr id="19" name="Rectangle 18"/>
           <p:cNvSpPr/>
           <p:nvPr/>
         </p:nvSpPr>
         <p:spPr>
           <a:xfrm>
-            <a:off x="8778020" y="1268730"/>
+            <a:off x="8899937" y="1954530"/>
             <a:ext cx="2804089" cy="411480"/>
           </a:xfrm>
           <a:prstGeom prst="rect">
@@ -11287,13 +11475,13 @@
       </p:sp>
       <p:sp>
         <p:nvSpPr>
-          <p:cNvPr id="18" name="TextBox 17"/>
-          <p:cNvSpPr txBox="1"/>
-          <p:nvPr/>
-        </p:nvSpPr>
-        <p:spPr>
-          <a:xfrm>
-            <a:off x="8778020" y="1296161"/>
+          <p:cNvPr id="20" name="TextBox 19"/>
+          <p:cNvSpPr txBox="1"/>
+          <p:nvPr/>
+        </p:nvSpPr>
+        <p:spPr>
+          <a:xfrm>
+            <a:off x="8899937" y="1981962"/>
             <a:ext cx="2804089" cy="356616"/>
           </a:xfrm>
           <a:prstGeom prst="rect">
@@ -11309,7 +11497,7 @@
           <a:p>
             <a:pPr algn="l"/>
             <a:r>
-              <a:rPr sz="750" b="0">
+              <a:rPr sz="800" b="0">
                 <a:solidFill>
                   <a:srgbClr val="1A1A1A"/>
                 </a:solidFill>
@@ -11322,13 +11510,13 @@
       </p:sp>
       <p:sp>
         <p:nvSpPr>
-          <p:cNvPr id="19" name="Rectangle 18"/>
+          <p:cNvPr id="21" name="Rectangle 20"/>
           <p:cNvSpPr/>
           <p:nvPr/>
         </p:nvSpPr>
         <p:spPr>
           <a:xfrm>
-            <a:off x="365750" y="1680210"/>
+            <a:off x="487667" y="2366010"/>
             <a:ext cx="2804089" cy="411480"/>
           </a:xfrm>
           <a:prstGeom prst="rect">
@@ -11368,13 +11556,13 @@
       </p:sp>
       <p:sp>
         <p:nvSpPr>
-          <p:cNvPr id="20" name="TextBox 19"/>
-          <p:cNvSpPr txBox="1"/>
-          <p:nvPr/>
-        </p:nvSpPr>
-        <p:spPr>
-          <a:xfrm>
-            <a:off x="365750" y="1707642"/>
+          <p:cNvPr id="22" name="TextBox 21"/>
+          <p:cNvSpPr txBox="1"/>
+          <p:nvPr/>
+        </p:nvSpPr>
+        <p:spPr>
+          <a:xfrm>
+            <a:off x="487667" y="2393442"/>
             <a:ext cx="2804089" cy="356616"/>
           </a:xfrm>
           <a:prstGeom prst="rect">
@@ -11390,7 +11578,7 @@
           <a:p>
             <a:pPr algn="l"/>
             <a:r>
-              <a:rPr sz="750" b="0">
+              <a:rPr sz="800" b="0">
                 <a:solidFill>
                   <a:srgbClr val="1A1A1A"/>
                 </a:solidFill>
@@ -11403,13 +11591,13 @@
       </p:sp>
       <p:sp>
         <p:nvSpPr>
-          <p:cNvPr id="21" name="Rectangle 20"/>
+          <p:cNvPr id="23" name="Rectangle 22"/>
           <p:cNvSpPr/>
           <p:nvPr/>
         </p:nvSpPr>
         <p:spPr>
           <a:xfrm>
-            <a:off x="3169840" y="1680210"/>
+            <a:off x="3291757" y="2366010"/>
             <a:ext cx="2804089" cy="411480"/>
           </a:xfrm>
           <a:prstGeom prst="rect">
@@ -11449,13 +11637,13 @@
       </p:sp>
       <p:sp>
         <p:nvSpPr>
-          <p:cNvPr id="22" name="TextBox 21"/>
-          <p:cNvSpPr txBox="1"/>
-          <p:nvPr/>
-        </p:nvSpPr>
-        <p:spPr>
-          <a:xfrm>
-            <a:off x="3169840" y="1707642"/>
+          <p:cNvPr id="24" name="TextBox 23"/>
+          <p:cNvSpPr txBox="1"/>
+          <p:nvPr/>
+        </p:nvSpPr>
+        <p:spPr>
+          <a:xfrm>
+            <a:off x="3291757" y="2393442"/>
             <a:ext cx="2804089" cy="356616"/>
           </a:xfrm>
           <a:prstGeom prst="rect">
@@ -11471,7 +11659,7 @@
           <a:p>
             <a:pPr algn="l"/>
             <a:r>
-              <a:rPr sz="750" b="0">
+              <a:rPr sz="800" b="0">
                 <a:solidFill>
                   <a:srgbClr val="1A1A1A"/>
                 </a:solidFill>
@@ -11484,13 +11672,13 @@
       </p:sp>
       <p:sp>
         <p:nvSpPr>
-          <p:cNvPr id="23" name="Rectangle 22"/>
+          <p:cNvPr id="25" name="Rectangle 24"/>
           <p:cNvSpPr/>
           <p:nvPr/>
         </p:nvSpPr>
         <p:spPr>
           <a:xfrm>
-            <a:off x="5973930" y="1680210"/>
+            <a:off x="6095847" y="2366010"/>
             <a:ext cx="2804089" cy="411480"/>
           </a:xfrm>
           <a:prstGeom prst="rect">
@@ -11530,13 +11718,13 @@
       </p:sp>
       <p:sp>
         <p:nvSpPr>
-          <p:cNvPr id="24" name="TextBox 23"/>
-          <p:cNvSpPr txBox="1"/>
-          <p:nvPr/>
-        </p:nvSpPr>
-        <p:spPr>
-          <a:xfrm>
-            <a:off x="5973930" y="1707642"/>
+          <p:cNvPr id="26" name="TextBox 25"/>
+          <p:cNvSpPr txBox="1"/>
+          <p:nvPr/>
+        </p:nvSpPr>
+        <p:spPr>
+          <a:xfrm>
+            <a:off x="6095847" y="2393442"/>
             <a:ext cx="2804089" cy="356616"/>
           </a:xfrm>
           <a:prstGeom prst="rect">
@@ -11552,7 +11740,7 @@
           <a:p>
             <a:pPr algn="l"/>
             <a:r>
-              <a:rPr sz="750" b="0">
+              <a:rPr sz="800" b="0">
                 <a:solidFill>
                   <a:srgbClr val="1A1A1A"/>
                 </a:solidFill>
@@ -11565,13 +11753,13 @@
       </p:sp>
       <p:sp>
         <p:nvSpPr>
-          <p:cNvPr id="25" name="Rectangle 24"/>
+          <p:cNvPr id="27" name="Rectangle 26"/>
           <p:cNvSpPr/>
           <p:nvPr/>
         </p:nvSpPr>
         <p:spPr>
           <a:xfrm>
-            <a:off x="8778020" y="1680210"/>
+            <a:off x="8899937" y="2366010"/>
             <a:ext cx="2804089" cy="411480"/>
           </a:xfrm>
           <a:prstGeom prst="rect">
@@ -11611,13 +11799,13 @@
       </p:sp>
       <p:sp>
         <p:nvSpPr>
-          <p:cNvPr id="26" name="TextBox 25"/>
-          <p:cNvSpPr txBox="1"/>
-          <p:nvPr/>
-        </p:nvSpPr>
-        <p:spPr>
-          <a:xfrm>
-            <a:off x="8778020" y="1707642"/>
+          <p:cNvPr id="28" name="TextBox 27"/>
+          <p:cNvSpPr txBox="1"/>
+          <p:nvPr/>
+        </p:nvSpPr>
+        <p:spPr>
+          <a:xfrm>
+            <a:off x="8899937" y="2393442"/>
             <a:ext cx="2804089" cy="356616"/>
           </a:xfrm>
           <a:prstGeom prst="rect">
@@ -11633,7 +11821,7 @@
           <a:p>
             <a:pPr algn="l"/>
             <a:r>
-              <a:rPr sz="750" b="0">
+              <a:rPr sz="800" b="0">
                 <a:solidFill>
                   <a:srgbClr val="1A1A1A"/>
                 </a:solidFill>
@@ -11646,13 +11834,13 @@
       </p:sp>
       <p:sp>
         <p:nvSpPr>
-          <p:cNvPr id="27" name="Rectangle 26"/>
+          <p:cNvPr id="29" name="Rectangle 28"/>
           <p:cNvSpPr/>
           <p:nvPr/>
         </p:nvSpPr>
         <p:spPr>
           <a:xfrm>
-            <a:off x="365750" y="2091690"/>
+            <a:off x="487667" y="2777490"/>
             <a:ext cx="2804089" cy="411480"/>
           </a:xfrm>
           <a:prstGeom prst="rect">
@@ -11692,13 +11880,13 @@
       </p:sp>
       <p:sp>
         <p:nvSpPr>
-          <p:cNvPr id="28" name="TextBox 27"/>
-          <p:cNvSpPr txBox="1"/>
-          <p:nvPr/>
-        </p:nvSpPr>
-        <p:spPr>
-          <a:xfrm>
-            <a:off x="365750" y="2119122"/>
+          <p:cNvPr id="30" name="TextBox 29"/>
+          <p:cNvSpPr txBox="1"/>
+          <p:nvPr/>
+        </p:nvSpPr>
+        <p:spPr>
+          <a:xfrm>
+            <a:off x="487667" y="2804922"/>
             <a:ext cx="2804089" cy="356616"/>
           </a:xfrm>
           <a:prstGeom prst="rect">
@@ -11714,7 +11902,7 @@
           <a:p>
             <a:pPr algn="l"/>
             <a:r>
-              <a:rPr sz="750" b="0">
+              <a:rPr sz="800" b="0">
                 <a:solidFill>
                   <a:srgbClr val="1A1A1A"/>
                 </a:solidFill>
@@ -11727,13 +11915,13 @@
       </p:sp>
       <p:sp>
         <p:nvSpPr>
-          <p:cNvPr id="29" name="Rectangle 28"/>
+          <p:cNvPr id="31" name="Rectangle 30"/>
           <p:cNvSpPr/>
           <p:nvPr/>
         </p:nvSpPr>
         <p:spPr>
           <a:xfrm>
-            <a:off x="3169840" y="2091690"/>
+            <a:off x="3291757" y="2777490"/>
             <a:ext cx="2804089" cy="411480"/>
           </a:xfrm>
           <a:prstGeom prst="rect">
@@ -11773,13 +11961,13 @@
       </p:sp>
       <p:sp>
         <p:nvSpPr>
-          <p:cNvPr id="30" name="TextBox 29"/>
-          <p:cNvSpPr txBox="1"/>
-          <p:nvPr/>
-        </p:nvSpPr>
-        <p:spPr>
-          <a:xfrm>
-            <a:off x="3169840" y="2119122"/>
+          <p:cNvPr id="32" name="TextBox 31"/>
+          <p:cNvSpPr txBox="1"/>
+          <p:nvPr/>
+        </p:nvSpPr>
+        <p:spPr>
+          <a:xfrm>
+            <a:off x="3291757" y="2804922"/>
             <a:ext cx="2804089" cy="356616"/>
           </a:xfrm>
           <a:prstGeom prst="rect">
@@ -11795,7 +11983,7 @@
           <a:p>
             <a:pPr algn="l"/>
             <a:r>
-              <a:rPr sz="750" b="0">
+              <a:rPr sz="800" b="0">
                 <a:solidFill>
                   <a:srgbClr val="1A1A1A"/>
                 </a:solidFill>
@@ -11808,13 +11996,13 @@
       </p:sp>
       <p:sp>
         <p:nvSpPr>
-          <p:cNvPr id="31" name="Rectangle 30"/>
+          <p:cNvPr id="33" name="Rectangle 32"/>
           <p:cNvSpPr/>
           <p:nvPr/>
         </p:nvSpPr>
         <p:spPr>
           <a:xfrm>
-            <a:off x="5973930" y="2091690"/>
+            <a:off x="6095847" y="2777490"/>
             <a:ext cx="2804089" cy="411480"/>
           </a:xfrm>
           <a:prstGeom prst="rect">
@@ -11854,13 +12042,13 @@
       </p:sp>
       <p:sp>
         <p:nvSpPr>
-          <p:cNvPr id="32" name="TextBox 31"/>
-          <p:cNvSpPr txBox="1"/>
-          <p:nvPr/>
-        </p:nvSpPr>
-        <p:spPr>
-          <a:xfrm>
-            <a:off x="5973930" y="2119122"/>
+          <p:cNvPr id="34" name="TextBox 33"/>
+          <p:cNvSpPr txBox="1"/>
+          <p:nvPr/>
+        </p:nvSpPr>
+        <p:spPr>
+          <a:xfrm>
+            <a:off x="6095847" y="2804922"/>
             <a:ext cx="2804089" cy="356616"/>
           </a:xfrm>
           <a:prstGeom prst="rect">
@@ -11876,7 +12064,7 @@
           <a:p>
             <a:pPr algn="l"/>
             <a:r>
-              <a:rPr sz="750" b="0">
+              <a:rPr sz="800" b="0">
                 <a:solidFill>
                   <a:srgbClr val="1A1A1A"/>
                 </a:solidFill>
@@ -11889,13 +12077,13 @@
       </p:sp>
       <p:sp>
         <p:nvSpPr>
-          <p:cNvPr id="33" name="Rectangle 32"/>
+          <p:cNvPr id="35" name="Rectangle 34"/>
           <p:cNvSpPr/>
           <p:nvPr/>
         </p:nvSpPr>
         <p:spPr>
           <a:xfrm>
-            <a:off x="8778020" y="2091690"/>
+            <a:off x="8899937" y="2777490"/>
             <a:ext cx="2804089" cy="411480"/>
           </a:xfrm>
           <a:prstGeom prst="rect">
@@ -11935,13 +12123,13 @@
       </p:sp>
       <p:sp>
         <p:nvSpPr>
-          <p:cNvPr id="34" name="TextBox 33"/>
-          <p:cNvSpPr txBox="1"/>
-          <p:nvPr/>
-        </p:nvSpPr>
-        <p:spPr>
-          <a:xfrm>
-            <a:off x="8778020" y="2119122"/>
+          <p:cNvPr id="36" name="TextBox 35"/>
+          <p:cNvSpPr txBox="1"/>
+          <p:nvPr/>
+        </p:nvSpPr>
+        <p:spPr>
+          <a:xfrm>
+            <a:off x="8899937" y="2804922"/>
             <a:ext cx="2804089" cy="356616"/>
           </a:xfrm>
           <a:prstGeom prst="rect">
@@ -11957,7 +12145,7 @@
           <a:p>
             <a:pPr algn="l"/>
             <a:r>
-              <a:rPr sz="750" b="0">
+              <a:rPr sz="800" b="0">
                 <a:solidFill>
                   <a:srgbClr val="1A1A1A"/>
                 </a:solidFill>
@@ -11970,13 +12158,13 @@
       </p:sp>
       <p:sp>
         <p:nvSpPr>
-          <p:cNvPr id="35" name="Rectangle 34"/>
+          <p:cNvPr id="37" name="Rectangle 36"/>
           <p:cNvSpPr/>
           <p:nvPr/>
         </p:nvSpPr>
         <p:spPr>
           <a:xfrm>
-            <a:off x="365750" y="2503170"/>
+            <a:off x="487667" y="3188970"/>
             <a:ext cx="2804089" cy="411480"/>
           </a:xfrm>
           <a:prstGeom prst="rect">
@@ -12016,13 +12204,13 @@
       </p:sp>
       <p:sp>
         <p:nvSpPr>
-          <p:cNvPr id="36" name="TextBox 35"/>
-          <p:cNvSpPr txBox="1"/>
-          <p:nvPr/>
-        </p:nvSpPr>
-        <p:spPr>
-          <a:xfrm>
-            <a:off x="365750" y="2530602"/>
+          <p:cNvPr id="38" name="TextBox 37"/>
+          <p:cNvSpPr txBox="1"/>
+          <p:nvPr/>
+        </p:nvSpPr>
+        <p:spPr>
+          <a:xfrm>
+            <a:off x="487667" y="3216402"/>
             <a:ext cx="2804089" cy="356616"/>
           </a:xfrm>
           <a:prstGeom prst="rect">
@@ -12038,7 +12226,7 @@
           <a:p>
             <a:pPr algn="l"/>
             <a:r>
-              <a:rPr sz="750" b="0">
+              <a:rPr sz="800" b="0">
                 <a:solidFill>
                   <a:srgbClr val="1A1A1A"/>
                 </a:solidFill>
@@ -12051,13 +12239,13 @@
       </p:sp>
       <p:sp>
         <p:nvSpPr>
-          <p:cNvPr id="37" name="Rectangle 36"/>
+          <p:cNvPr id="39" name="Rectangle 38"/>
           <p:cNvSpPr/>
           <p:nvPr/>
         </p:nvSpPr>
         <p:spPr>
           <a:xfrm>
-            <a:off x="3169840" y="2503170"/>
+            <a:off x="3291757" y="3188970"/>
             <a:ext cx="2804089" cy="411480"/>
           </a:xfrm>
           <a:prstGeom prst="rect">
@@ -12097,13 +12285,13 @@
       </p:sp>
       <p:sp>
         <p:nvSpPr>
-          <p:cNvPr id="38" name="TextBox 37"/>
-          <p:cNvSpPr txBox="1"/>
-          <p:nvPr/>
-        </p:nvSpPr>
-        <p:spPr>
-          <a:xfrm>
-            <a:off x="3169840" y="2530602"/>
+          <p:cNvPr id="40" name="TextBox 39"/>
+          <p:cNvSpPr txBox="1"/>
+          <p:nvPr/>
+        </p:nvSpPr>
+        <p:spPr>
+          <a:xfrm>
+            <a:off x="3291757" y="3216402"/>
             <a:ext cx="2804089" cy="356616"/>
           </a:xfrm>
           <a:prstGeom prst="rect">
@@ -12119,7 +12307,7 @@
           <a:p>
             <a:pPr algn="l"/>
             <a:r>
-              <a:rPr sz="750" b="0">
+              <a:rPr sz="800" b="0">
                 <a:solidFill>
                   <a:srgbClr val="1A1A1A"/>
                 </a:solidFill>
@@ -12132,13 +12320,13 @@
       </p:sp>
       <p:sp>
         <p:nvSpPr>
-          <p:cNvPr id="39" name="Rectangle 38"/>
+          <p:cNvPr id="41" name="Rectangle 40"/>
           <p:cNvSpPr/>
           <p:nvPr/>
         </p:nvSpPr>
         <p:spPr>
           <a:xfrm>
-            <a:off x="5973930" y="2503170"/>
+            <a:off x="6095847" y="3188970"/>
             <a:ext cx="2804089" cy="411480"/>
           </a:xfrm>
           <a:prstGeom prst="rect">
@@ -12178,13 +12366,13 @@
       </p:sp>
       <p:sp>
         <p:nvSpPr>
-          <p:cNvPr id="40" name="TextBox 39"/>
-          <p:cNvSpPr txBox="1"/>
-          <p:nvPr/>
-        </p:nvSpPr>
-        <p:spPr>
-          <a:xfrm>
-            <a:off x="5973930" y="2530602"/>
+          <p:cNvPr id="42" name="TextBox 41"/>
+          <p:cNvSpPr txBox="1"/>
+          <p:nvPr/>
+        </p:nvSpPr>
+        <p:spPr>
+          <a:xfrm>
+            <a:off x="6095847" y="3216402"/>
             <a:ext cx="2804089" cy="356616"/>
           </a:xfrm>
           <a:prstGeom prst="rect">
@@ -12200,7 +12388,7 @@
           <a:p>
             <a:pPr algn="l"/>
             <a:r>
-              <a:rPr sz="750" b="0">
+              <a:rPr sz="800" b="0">
                 <a:solidFill>
                   <a:srgbClr val="1A1A1A"/>
                 </a:solidFill>
@@ -12213,13 +12401,13 @@
       </p:sp>
       <p:sp>
         <p:nvSpPr>
-          <p:cNvPr id="41" name="Rectangle 40"/>
+          <p:cNvPr id="43" name="Rectangle 42"/>
           <p:cNvSpPr/>
           <p:nvPr/>
         </p:nvSpPr>
         <p:spPr>
           <a:xfrm>
-            <a:off x="8778020" y="2503170"/>
+            <a:off x="8899937" y="3188970"/>
             <a:ext cx="2804089" cy="411480"/>
           </a:xfrm>
           <a:prstGeom prst="rect">
@@ -12259,13 +12447,13 @@
       </p:sp>
       <p:sp>
         <p:nvSpPr>
-          <p:cNvPr id="42" name="TextBox 41"/>
-          <p:cNvSpPr txBox="1"/>
-          <p:nvPr/>
-        </p:nvSpPr>
-        <p:spPr>
-          <a:xfrm>
-            <a:off x="8778020" y="2530602"/>
+          <p:cNvPr id="44" name="TextBox 43"/>
+          <p:cNvSpPr txBox="1"/>
+          <p:nvPr/>
+        </p:nvSpPr>
+        <p:spPr>
+          <a:xfrm>
+            <a:off x="8899937" y="3216402"/>
             <a:ext cx="2804089" cy="356616"/>
           </a:xfrm>
           <a:prstGeom prst="rect">
@@ -12281,7 +12469,7 @@
           <a:p>
             <a:pPr algn="l"/>
             <a:r>
-              <a:rPr sz="750" b="0">
+              <a:rPr sz="800" b="0">
                 <a:solidFill>
                   <a:srgbClr val="1A1A1A"/>
                 </a:solidFill>
@@ -12294,7 +12482,7 @@
       </p:sp>
       <p:sp>
         <p:nvSpPr>
-          <p:cNvPr id="43" name="TextBox 42"/>
+          <p:cNvPr id="45" name="TextBox 44"/>
           <p:cNvSpPr txBox="1"/>
           <p:nvPr/>
         </p:nvSpPr>
@@ -12329,7 +12517,7 @@
       </p:sp>
       <p:sp>
         <p:nvSpPr>
-          <p:cNvPr id="44" name="TextBox 43"/>
+          <p:cNvPr id="46" name="TextBox 45"/>
           <p:cNvSpPr txBox="1"/>
           <p:nvPr/>
         </p:nvSpPr>
@@ -12388,42 +12576,77 @@
         </p:nvSpPr>
         <p:spPr>
           <a:xfrm>
-            <a:off x="365750" y="274320"/>
-            <a:ext cx="10972525" cy="480060"/>
-          </a:xfrm>
-          <a:prstGeom prst="rect">
-            <a:avLst/>
-          </a:prstGeom>
-          <a:noFill/>
-        </p:spPr>
-        <p:txBody>
-          <a:bodyPr wrap="square" lIns="36000" rIns="36000" tIns="18000" bIns="18000">
-            <a:spAutoFit/>
-          </a:bodyPr>
-          <a:lstStyle/>
-          <a:p>
-            <a:pPr algn="l"/>
-            <a:r>
-              <a:rPr sz="1700" b="1">
+            <a:off x="487667" y="137160"/>
+            <a:ext cx="7315017" cy="274320"/>
+          </a:xfrm>
+          <a:prstGeom prst="rect">
+            <a:avLst/>
+          </a:prstGeom>
+          <a:noFill/>
+        </p:spPr>
+        <p:txBody>
+          <a:bodyPr wrap="square" lIns="36000" rIns="36000" tIns="18000" bIns="18000">
+            <a:spAutoFit/>
+          </a:bodyPr>
+          <a:lstStyle/>
+          <a:p>
+            <a:pPr algn="l"/>
+            <a:r>
+              <a:rPr sz="900" b="0">
+                <a:solidFill>
+                  <a:srgbClr val="767676"/>
+                </a:solidFill>
+                <a:latin typeface="Pretendard"/>
+              </a:rPr>
+              <a:t>디자인 시안전략</a:t>
+            </a:r>
+          </a:p>
+        </p:txBody>
+      </p:sp>
+      <p:sp>
+        <p:nvSpPr>
+          <p:cNvPr id="3" name="TextBox 2"/>
+          <p:cNvSpPr txBox="1"/>
+          <p:nvPr/>
+        </p:nvSpPr>
+        <p:spPr>
+          <a:xfrm>
+            <a:off x="487667" y="548640"/>
+            <a:ext cx="11216359" cy="548640"/>
+          </a:xfrm>
+          <a:prstGeom prst="rect">
+            <a:avLst/>
+          </a:prstGeom>
+          <a:noFill/>
+        </p:spPr>
+        <p:txBody>
+          <a:bodyPr wrap="square" lIns="36000" rIns="36000" tIns="18000" bIns="18000">
+            <a:spAutoFit/>
+          </a:bodyPr>
+          <a:lstStyle/>
+          <a:p>
+            <a:pPr algn="l"/>
+            <a:r>
+              <a:rPr sz="2400" b="1">
                 <a:solidFill>
                   <a:srgbClr val="1A1A1A"/>
                 </a:solidFill>
                 <a:latin typeface="Pretendard"/>
               </a:rPr>
-              <a:t>7. ⚠️ 한계</a:t>
-            </a:r>
-          </a:p>
-        </p:txBody>
-      </p:sp>
-      <p:sp>
-        <p:nvSpPr>
-          <p:cNvPr id="3" name="Rectangle 2"/>
+              <a:t>⚠️ 한계</a:t>
+            </a:r>
+          </a:p>
+        </p:txBody>
+      </p:sp>
+      <p:sp>
+        <p:nvSpPr>
+          <p:cNvPr id="4" name="Rectangle 3"/>
           <p:cNvSpPr/>
           <p:nvPr/>
         </p:nvSpPr>
         <p:spPr>
           <a:xfrm>
-            <a:off x="365750" y="891540"/>
+            <a:off x="487667" y="1234440"/>
             <a:ext cx="3169840" cy="377190"/>
           </a:xfrm>
           <a:prstGeom prst="rect">
@@ -12463,13 +12686,13 @@
       </p:sp>
       <p:sp>
         <p:nvSpPr>
-          <p:cNvPr id="4" name="TextBox 3"/>
-          <p:cNvSpPr txBox="1"/>
-          <p:nvPr/>
-        </p:nvSpPr>
-        <p:spPr>
-          <a:xfrm>
-            <a:off x="365750" y="946404"/>
+          <p:cNvPr id="5" name="TextBox 4"/>
+          <p:cNvSpPr txBox="1"/>
+          <p:nvPr/>
+        </p:nvSpPr>
+        <p:spPr>
+          <a:xfrm>
+            <a:off x="487667" y="1289304"/>
             <a:ext cx="3169840" cy="301752"/>
           </a:xfrm>
           <a:prstGeom prst="rect">
@@ -12498,13 +12721,13 @@
       </p:sp>
       <p:sp>
         <p:nvSpPr>
-          <p:cNvPr id="5" name="Rectangle 4"/>
+          <p:cNvPr id="6" name="Rectangle 5"/>
           <p:cNvSpPr/>
           <p:nvPr/>
         </p:nvSpPr>
         <p:spPr>
           <a:xfrm>
-            <a:off x="3535591" y="891540"/>
+            <a:off x="3657508" y="1234440"/>
             <a:ext cx="4145176" cy="377190"/>
           </a:xfrm>
           <a:prstGeom prst="rect">
@@ -12544,13 +12767,13 @@
       </p:sp>
       <p:sp>
         <p:nvSpPr>
-          <p:cNvPr id="6" name="TextBox 5"/>
-          <p:cNvSpPr txBox="1"/>
-          <p:nvPr/>
-        </p:nvSpPr>
-        <p:spPr>
-          <a:xfrm>
-            <a:off x="3535591" y="946404"/>
+          <p:cNvPr id="7" name="TextBox 6"/>
+          <p:cNvSpPr txBox="1"/>
+          <p:nvPr/>
+        </p:nvSpPr>
+        <p:spPr>
+          <a:xfrm>
+            <a:off x="3657508" y="1289304"/>
             <a:ext cx="4145176" cy="301752"/>
           </a:xfrm>
           <a:prstGeom prst="rect">
@@ -12579,13 +12802,13 @@
       </p:sp>
       <p:sp>
         <p:nvSpPr>
-          <p:cNvPr id="7" name="Rectangle 6"/>
+          <p:cNvPr id="8" name="Rectangle 7"/>
           <p:cNvSpPr/>
           <p:nvPr/>
         </p:nvSpPr>
         <p:spPr>
           <a:xfrm>
-            <a:off x="7680767" y="891540"/>
+            <a:off x="7802684" y="1234440"/>
             <a:ext cx="4145176" cy="377190"/>
           </a:xfrm>
           <a:prstGeom prst="rect">
@@ -12625,13 +12848,13 @@
       </p:sp>
       <p:sp>
         <p:nvSpPr>
-          <p:cNvPr id="8" name="TextBox 7"/>
-          <p:cNvSpPr txBox="1"/>
-          <p:nvPr/>
-        </p:nvSpPr>
-        <p:spPr>
-          <a:xfrm>
-            <a:off x="7680767" y="946404"/>
+          <p:cNvPr id="9" name="TextBox 8"/>
+          <p:cNvSpPr txBox="1"/>
+          <p:nvPr/>
+        </p:nvSpPr>
+        <p:spPr>
+          <a:xfrm>
+            <a:off x="7802684" y="1289304"/>
             <a:ext cx="4145176" cy="301752"/>
           </a:xfrm>
           <a:prstGeom prst="rect">
@@ -12660,13 +12883,13 @@
       </p:sp>
       <p:sp>
         <p:nvSpPr>
-          <p:cNvPr id="9" name="Rectangle 8"/>
+          <p:cNvPr id="10" name="Rectangle 9"/>
           <p:cNvSpPr/>
           <p:nvPr/>
         </p:nvSpPr>
         <p:spPr>
           <a:xfrm>
-            <a:off x="365750" y="1268730"/>
+            <a:off x="487667" y="1611630"/>
             <a:ext cx="3169840" cy="534924"/>
           </a:xfrm>
           <a:prstGeom prst="rect">
@@ -12706,13 +12929,13 @@
       </p:sp>
       <p:sp>
         <p:nvSpPr>
-          <p:cNvPr id="10" name="TextBox 9"/>
-          <p:cNvSpPr txBox="1"/>
-          <p:nvPr/>
-        </p:nvSpPr>
-        <p:spPr>
-          <a:xfrm>
-            <a:off x="365750" y="1296161"/>
+          <p:cNvPr id="11" name="TextBox 10"/>
+          <p:cNvSpPr txBox="1"/>
+          <p:nvPr/>
+        </p:nvSpPr>
+        <p:spPr>
+          <a:xfrm>
+            <a:off x="487667" y="1639062"/>
             <a:ext cx="3169840" cy="480060"/>
           </a:xfrm>
           <a:prstGeom prst="rect">
@@ -12728,7 +12951,7 @@
           <a:p>
             <a:pPr algn="l"/>
             <a:r>
-              <a:rPr sz="750" b="0">
+              <a:rPr sz="800" b="0">
                 <a:solidFill>
                   <a:srgbClr val="1A1A1A"/>
                 </a:solidFill>
@@ -12741,13 +12964,13 @@
       </p:sp>
       <p:sp>
         <p:nvSpPr>
-          <p:cNvPr id="11" name="Rectangle 10"/>
+          <p:cNvPr id="12" name="Rectangle 11"/>
           <p:cNvSpPr/>
           <p:nvPr/>
         </p:nvSpPr>
         <p:spPr>
           <a:xfrm>
-            <a:off x="3535591" y="1268730"/>
+            <a:off x="3657508" y="1611630"/>
             <a:ext cx="4145176" cy="534924"/>
           </a:xfrm>
           <a:prstGeom prst="rect">
@@ -12787,13 +13010,13 @@
       </p:sp>
       <p:sp>
         <p:nvSpPr>
-          <p:cNvPr id="12" name="TextBox 11"/>
-          <p:cNvSpPr txBox="1"/>
-          <p:nvPr/>
-        </p:nvSpPr>
-        <p:spPr>
-          <a:xfrm>
-            <a:off x="3535591" y="1296161"/>
+          <p:cNvPr id="13" name="TextBox 12"/>
+          <p:cNvSpPr txBox="1"/>
+          <p:nvPr/>
+        </p:nvSpPr>
+        <p:spPr>
+          <a:xfrm>
+            <a:off x="3657508" y="1639062"/>
             <a:ext cx="4145176" cy="480060"/>
           </a:xfrm>
           <a:prstGeom prst="rect">
@@ -12809,7 +13032,7 @@
           <a:p>
             <a:pPr algn="l"/>
             <a:r>
-              <a:rPr sz="750" b="0">
+              <a:rPr sz="800" b="0">
                 <a:solidFill>
                   <a:srgbClr val="1A1A1A"/>
                 </a:solidFill>
@@ -12822,13 +13045,13 @@
       </p:sp>
       <p:sp>
         <p:nvSpPr>
-          <p:cNvPr id="13" name="Rectangle 12"/>
+          <p:cNvPr id="14" name="Rectangle 13"/>
           <p:cNvSpPr/>
           <p:nvPr/>
         </p:nvSpPr>
         <p:spPr>
           <a:xfrm>
-            <a:off x="7680767" y="1268730"/>
+            <a:off x="7802684" y="1611630"/>
             <a:ext cx="4145176" cy="534924"/>
           </a:xfrm>
           <a:prstGeom prst="rect">
@@ -12868,13 +13091,13 @@
       </p:sp>
       <p:sp>
         <p:nvSpPr>
-          <p:cNvPr id="14" name="TextBox 13"/>
-          <p:cNvSpPr txBox="1"/>
-          <p:nvPr/>
-        </p:nvSpPr>
-        <p:spPr>
-          <a:xfrm>
-            <a:off x="7680767" y="1296161"/>
+          <p:cNvPr id="15" name="TextBox 14"/>
+          <p:cNvSpPr txBox="1"/>
+          <p:nvPr/>
+        </p:nvSpPr>
+        <p:spPr>
+          <a:xfrm>
+            <a:off x="7802684" y="1639062"/>
             <a:ext cx="4145176" cy="480060"/>
           </a:xfrm>
           <a:prstGeom prst="rect">
@@ -12890,7 +13113,7 @@
           <a:p>
             <a:pPr algn="l"/>
             <a:r>
-              <a:rPr sz="750" b="0">
+              <a:rPr sz="800" b="0">
                 <a:solidFill>
                   <a:srgbClr val="1A1A1A"/>
                 </a:solidFill>
@@ -12903,13 +13126,13 @@
       </p:sp>
       <p:sp>
         <p:nvSpPr>
-          <p:cNvPr id="15" name="Rectangle 14"/>
+          <p:cNvPr id="16" name="Rectangle 15"/>
           <p:cNvSpPr/>
           <p:nvPr/>
         </p:nvSpPr>
         <p:spPr>
           <a:xfrm>
-            <a:off x="365750" y="1803654"/>
+            <a:off x="487667" y="2146554"/>
             <a:ext cx="3169840" cy="534924"/>
           </a:xfrm>
           <a:prstGeom prst="rect">
@@ -12949,13 +13172,13 @@
       </p:sp>
       <p:sp>
         <p:nvSpPr>
-          <p:cNvPr id="16" name="TextBox 15"/>
-          <p:cNvSpPr txBox="1"/>
-          <p:nvPr/>
-        </p:nvSpPr>
-        <p:spPr>
-          <a:xfrm>
-            <a:off x="365750" y="1831086"/>
+          <p:cNvPr id="17" name="TextBox 16"/>
+          <p:cNvSpPr txBox="1"/>
+          <p:nvPr/>
+        </p:nvSpPr>
+        <p:spPr>
+          <a:xfrm>
+            <a:off x="487667" y="2173986"/>
             <a:ext cx="3169840" cy="480060"/>
           </a:xfrm>
           <a:prstGeom prst="rect">
@@ -12971,7 +13194,7 @@
           <a:p>
             <a:pPr algn="l"/>
             <a:r>
-              <a:rPr sz="750" b="0">
+              <a:rPr sz="800" b="0">
                 <a:solidFill>
                   <a:srgbClr val="1A1A1A"/>
                 </a:solidFill>
@@ -12984,13 +13207,13 @@
       </p:sp>
       <p:sp>
         <p:nvSpPr>
-          <p:cNvPr id="17" name="Rectangle 16"/>
+          <p:cNvPr id="18" name="Rectangle 17"/>
           <p:cNvSpPr/>
           <p:nvPr/>
         </p:nvSpPr>
         <p:spPr>
           <a:xfrm>
-            <a:off x="3535591" y="1803654"/>
+            <a:off x="3657508" y="2146554"/>
             <a:ext cx="4145176" cy="534924"/>
           </a:xfrm>
           <a:prstGeom prst="rect">
@@ -13030,13 +13253,13 @@
       </p:sp>
       <p:sp>
         <p:nvSpPr>
-          <p:cNvPr id="18" name="TextBox 17"/>
-          <p:cNvSpPr txBox="1"/>
-          <p:nvPr/>
-        </p:nvSpPr>
-        <p:spPr>
-          <a:xfrm>
-            <a:off x="3535591" y="1831086"/>
+          <p:cNvPr id="19" name="TextBox 18"/>
+          <p:cNvSpPr txBox="1"/>
+          <p:nvPr/>
+        </p:nvSpPr>
+        <p:spPr>
+          <a:xfrm>
+            <a:off x="3657508" y="2173986"/>
             <a:ext cx="4145176" cy="480060"/>
           </a:xfrm>
           <a:prstGeom prst="rect">
@@ -13052,7 +13275,7 @@
           <a:p>
             <a:pPr algn="l"/>
             <a:r>
-              <a:rPr sz="750" b="0">
+              <a:rPr sz="800" b="0">
                 <a:solidFill>
                   <a:srgbClr val="1A1A1A"/>
                 </a:solidFill>
@@ -13065,13 +13288,13 @@
       </p:sp>
       <p:sp>
         <p:nvSpPr>
-          <p:cNvPr id="19" name="Rectangle 18"/>
+          <p:cNvPr id="20" name="Rectangle 19"/>
           <p:cNvSpPr/>
           <p:nvPr/>
         </p:nvSpPr>
         <p:spPr>
           <a:xfrm>
-            <a:off x="7680767" y="1803654"/>
+            <a:off x="7802684" y="2146554"/>
             <a:ext cx="4145176" cy="534924"/>
           </a:xfrm>
           <a:prstGeom prst="rect">
@@ -13111,13 +13334,13 @@
       </p:sp>
       <p:sp>
         <p:nvSpPr>
-          <p:cNvPr id="20" name="TextBox 19"/>
-          <p:cNvSpPr txBox="1"/>
-          <p:nvPr/>
-        </p:nvSpPr>
-        <p:spPr>
-          <a:xfrm>
-            <a:off x="7680767" y="1831086"/>
+          <p:cNvPr id="21" name="TextBox 20"/>
+          <p:cNvSpPr txBox="1"/>
+          <p:nvPr/>
+        </p:nvSpPr>
+        <p:spPr>
+          <a:xfrm>
+            <a:off x="7802684" y="2173986"/>
             <a:ext cx="4145176" cy="480060"/>
           </a:xfrm>
           <a:prstGeom prst="rect">
@@ -13133,7 +13356,7 @@
           <a:p>
             <a:pPr algn="l"/>
             <a:r>
-              <a:rPr sz="750" b="0">
+              <a:rPr sz="800" b="0">
                 <a:solidFill>
                   <a:srgbClr val="1A1A1A"/>
                 </a:solidFill>
@@ -13146,13 +13369,13 @@
       </p:sp>
       <p:sp>
         <p:nvSpPr>
-          <p:cNvPr id="21" name="Rectangle 20"/>
+          <p:cNvPr id="22" name="Rectangle 21"/>
           <p:cNvSpPr/>
           <p:nvPr/>
         </p:nvSpPr>
         <p:spPr>
           <a:xfrm>
-            <a:off x="365750" y="2338578"/>
+            <a:off x="487667" y="2681478"/>
             <a:ext cx="3169840" cy="534924"/>
           </a:xfrm>
           <a:prstGeom prst="rect">
@@ -13192,13 +13415,13 @@
       </p:sp>
       <p:sp>
         <p:nvSpPr>
-          <p:cNvPr id="22" name="TextBox 21"/>
-          <p:cNvSpPr txBox="1"/>
-          <p:nvPr/>
-        </p:nvSpPr>
-        <p:spPr>
-          <a:xfrm>
-            <a:off x="365750" y="2366010"/>
+          <p:cNvPr id="23" name="TextBox 22"/>
+          <p:cNvSpPr txBox="1"/>
+          <p:nvPr/>
+        </p:nvSpPr>
+        <p:spPr>
+          <a:xfrm>
+            <a:off x="487667" y="2708910"/>
             <a:ext cx="3169840" cy="480060"/>
           </a:xfrm>
           <a:prstGeom prst="rect">
@@ -13214,7 +13437,7 @@
           <a:p>
             <a:pPr algn="l"/>
             <a:r>
-              <a:rPr sz="750" b="0">
+              <a:rPr sz="800" b="0">
                 <a:solidFill>
                   <a:srgbClr val="1A1A1A"/>
                 </a:solidFill>
@@ -13227,13 +13450,13 @@
       </p:sp>
       <p:sp>
         <p:nvSpPr>
-          <p:cNvPr id="23" name="Rectangle 22"/>
+          <p:cNvPr id="24" name="Rectangle 23"/>
           <p:cNvSpPr/>
           <p:nvPr/>
         </p:nvSpPr>
         <p:spPr>
           <a:xfrm>
-            <a:off x="3535591" y="2338578"/>
+            <a:off x="3657508" y="2681478"/>
             <a:ext cx="4145176" cy="534924"/>
           </a:xfrm>
           <a:prstGeom prst="rect">
@@ -13273,13 +13496,13 @@
       </p:sp>
       <p:sp>
         <p:nvSpPr>
-          <p:cNvPr id="24" name="TextBox 23"/>
-          <p:cNvSpPr txBox="1"/>
-          <p:nvPr/>
-        </p:nvSpPr>
-        <p:spPr>
-          <a:xfrm>
-            <a:off x="3535591" y="2366010"/>
+          <p:cNvPr id="25" name="TextBox 24"/>
+          <p:cNvSpPr txBox="1"/>
+          <p:nvPr/>
+        </p:nvSpPr>
+        <p:spPr>
+          <a:xfrm>
+            <a:off x="3657508" y="2708910"/>
             <a:ext cx="4145176" cy="480060"/>
           </a:xfrm>
           <a:prstGeom prst="rect">
@@ -13295,7 +13518,7 @@
           <a:p>
             <a:pPr algn="l"/>
             <a:r>
-              <a:rPr sz="750" b="0">
+              <a:rPr sz="800" b="0">
                 <a:solidFill>
                   <a:srgbClr val="1A1A1A"/>
                 </a:solidFill>
@@ -13308,13 +13531,13 @@
       </p:sp>
       <p:sp>
         <p:nvSpPr>
-          <p:cNvPr id="25" name="Rectangle 24"/>
+          <p:cNvPr id="26" name="Rectangle 25"/>
           <p:cNvSpPr/>
           <p:nvPr/>
         </p:nvSpPr>
         <p:spPr>
           <a:xfrm>
-            <a:off x="7680767" y="2338578"/>
+            <a:off x="7802684" y="2681478"/>
             <a:ext cx="4145176" cy="534924"/>
           </a:xfrm>
           <a:prstGeom prst="rect">
@@ -13354,13 +13577,13 @@
       </p:sp>
       <p:sp>
         <p:nvSpPr>
-          <p:cNvPr id="26" name="TextBox 25"/>
-          <p:cNvSpPr txBox="1"/>
-          <p:nvPr/>
-        </p:nvSpPr>
-        <p:spPr>
-          <a:xfrm>
-            <a:off x="7680767" y="2366010"/>
+          <p:cNvPr id="27" name="TextBox 26"/>
+          <p:cNvSpPr txBox="1"/>
+          <p:nvPr/>
+        </p:nvSpPr>
+        <p:spPr>
+          <a:xfrm>
+            <a:off x="7802684" y="2708910"/>
             <a:ext cx="4145176" cy="480060"/>
           </a:xfrm>
           <a:prstGeom prst="rect">
@@ -13376,7 +13599,7 @@
           <a:p>
             <a:pPr algn="l"/>
             <a:r>
-              <a:rPr sz="750" b="0">
+              <a:rPr sz="800" b="0">
                 <a:solidFill>
                   <a:srgbClr val="1A1A1A"/>
                 </a:solidFill>
@@ -13389,13 +13612,13 @@
       </p:sp>
       <p:sp>
         <p:nvSpPr>
-          <p:cNvPr id="27" name="Rectangle 26"/>
+          <p:cNvPr id="28" name="Rectangle 27"/>
           <p:cNvSpPr/>
           <p:nvPr/>
         </p:nvSpPr>
         <p:spPr>
           <a:xfrm>
-            <a:off x="365750" y="2873502"/>
+            <a:off x="487667" y="3216402"/>
             <a:ext cx="3169840" cy="411480"/>
           </a:xfrm>
           <a:prstGeom prst="rect">
@@ -13435,13 +13658,13 @@
       </p:sp>
       <p:sp>
         <p:nvSpPr>
-          <p:cNvPr id="28" name="TextBox 27"/>
-          <p:cNvSpPr txBox="1"/>
-          <p:nvPr/>
-        </p:nvSpPr>
-        <p:spPr>
-          <a:xfrm>
-            <a:off x="365750" y="2900934"/>
+          <p:cNvPr id="29" name="TextBox 28"/>
+          <p:cNvSpPr txBox="1"/>
+          <p:nvPr/>
+        </p:nvSpPr>
+        <p:spPr>
+          <a:xfrm>
+            <a:off x="487667" y="3243834"/>
             <a:ext cx="3169840" cy="356616"/>
           </a:xfrm>
           <a:prstGeom prst="rect">
@@ -13457,7 +13680,7 @@
           <a:p>
             <a:pPr algn="l"/>
             <a:r>
-              <a:rPr sz="750" b="0">
+              <a:rPr sz="800" b="0">
                 <a:solidFill>
                   <a:srgbClr val="1A1A1A"/>
                 </a:solidFill>
@@ -13470,13 +13693,13 @@
       </p:sp>
       <p:sp>
         <p:nvSpPr>
-          <p:cNvPr id="29" name="Rectangle 28"/>
+          <p:cNvPr id="30" name="Rectangle 29"/>
           <p:cNvSpPr/>
           <p:nvPr/>
         </p:nvSpPr>
         <p:spPr>
           <a:xfrm>
-            <a:off x="3535591" y="2873502"/>
+            <a:off x="3657508" y="3216402"/>
             <a:ext cx="4145176" cy="411480"/>
           </a:xfrm>
           <a:prstGeom prst="rect">
@@ -13516,13 +13739,13 @@
       </p:sp>
       <p:sp>
         <p:nvSpPr>
-          <p:cNvPr id="30" name="TextBox 29"/>
-          <p:cNvSpPr txBox="1"/>
-          <p:nvPr/>
-        </p:nvSpPr>
-        <p:spPr>
-          <a:xfrm>
-            <a:off x="3535591" y="2900934"/>
+          <p:cNvPr id="31" name="TextBox 30"/>
+          <p:cNvSpPr txBox="1"/>
+          <p:nvPr/>
+        </p:nvSpPr>
+        <p:spPr>
+          <a:xfrm>
+            <a:off x="3657508" y="3243834"/>
             <a:ext cx="4145176" cy="356616"/>
           </a:xfrm>
           <a:prstGeom prst="rect">
@@ -13538,7 +13761,7 @@
           <a:p>
             <a:pPr algn="l"/>
             <a:r>
-              <a:rPr sz="750" b="0">
+              <a:rPr sz="800" b="0">
                 <a:solidFill>
                   <a:srgbClr val="1A1A1A"/>
                 </a:solidFill>
@@ -13551,13 +13774,13 @@
       </p:sp>
       <p:sp>
         <p:nvSpPr>
-          <p:cNvPr id="31" name="Rectangle 30"/>
+          <p:cNvPr id="32" name="Rectangle 31"/>
           <p:cNvSpPr/>
           <p:nvPr/>
         </p:nvSpPr>
         <p:spPr>
           <a:xfrm>
-            <a:off x="7680767" y="2873502"/>
+            <a:off x="7802684" y="3216402"/>
             <a:ext cx="4145176" cy="411480"/>
           </a:xfrm>
           <a:prstGeom prst="rect">
@@ -13597,13 +13820,13 @@
       </p:sp>
       <p:sp>
         <p:nvSpPr>
-          <p:cNvPr id="32" name="TextBox 31"/>
-          <p:cNvSpPr txBox="1"/>
-          <p:nvPr/>
-        </p:nvSpPr>
-        <p:spPr>
-          <a:xfrm>
-            <a:off x="7680767" y="2900934"/>
+          <p:cNvPr id="33" name="TextBox 32"/>
+          <p:cNvSpPr txBox="1"/>
+          <p:nvPr/>
+        </p:nvSpPr>
+        <p:spPr>
+          <a:xfrm>
+            <a:off x="7802684" y="3243834"/>
             <a:ext cx="4145176" cy="356616"/>
           </a:xfrm>
           <a:prstGeom prst="rect">
@@ -13619,7 +13842,7 @@
           <a:p>
             <a:pPr algn="l"/>
             <a:r>
-              <a:rPr sz="750" b="0">
+              <a:rPr sz="800" b="0">
                 <a:solidFill>
                   <a:srgbClr val="1A1A1A"/>
                 </a:solidFill>
@@ -13632,13 +13855,13 @@
       </p:sp>
       <p:sp>
         <p:nvSpPr>
-          <p:cNvPr id="33" name="Rectangle 32"/>
+          <p:cNvPr id="34" name="Rectangle 33"/>
           <p:cNvSpPr/>
           <p:nvPr/>
         </p:nvSpPr>
         <p:spPr>
           <a:xfrm>
-            <a:off x="365750" y="3284982"/>
+            <a:off x="487667" y="3627882"/>
             <a:ext cx="3169840" cy="699516"/>
           </a:xfrm>
           <a:prstGeom prst="rect">
@@ -13678,13 +13901,13 @@
       </p:sp>
       <p:sp>
         <p:nvSpPr>
-          <p:cNvPr id="34" name="TextBox 33"/>
-          <p:cNvSpPr txBox="1"/>
-          <p:nvPr/>
-        </p:nvSpPr>
-        <p:spPr>
-          <a:xfrm>
-            <a:off x="365750" y="3312414"/>
+          <p:cNvPr id="35" name="TextBox 34"/>
+          <p:cNvSpPr txBox="1"/>
+          <p:nvPr/>
+        </p:nvSpPr>
+        <p:spPr>
+          <a:xfrm>
+            <a:off x="487667" y="3655314"/>
             <a:ext cx="3169840" cy="644651"/>
           </a:xfrm>
           <a:prstGeom prst="rect">
@@ -13700,7 +13923,7 @@
           <a:p>
             <a:pPr algn="l"/>
             <a:r>
-              <a:rPr sz="750" b="0">
+              <a:rPr sz="800" b="0">
                 <a:solidFill>
                   <a:srgbClr val="1A1A1A"/>
                 </a:solidFill>
@@ -13713,13 +13936,13 @@
       </p:sp>
       <p:sp>
         <p:nvSpPr>
-          <p:cNvPr id="35" name="Rectangle 34"/>
+          <p:cNvPr id="36" name="Rectangle 35"/>
           <p:cNvSpPr/>
           <p:nvPr/>
         </p:nvSpPr>
         <p:spPr>
           <a:xfrm>
-            <a:off x="3535591" y="3284982"/>
+            <a:off x="3657508" y="3627882"/>
             <a:ext cx="4145176" cy="699516"/>
           </a:xfrm>
           <a:prstGeom prst="rect">
@@ -13759,13 +13982,13 @@
       </p:sp>
       <p:sp>
         <p:nvSpPr>
-          <p:cNvPr id="36" name="TextBox 35"/>
-          <p:cNvSpPr txBox="1"/>
-          <p:nvPr/>
-        </p:nvSpPr>
-        <p:spPr>
-          <a:xfrm>
-            <a:off x="3535591" y="3312414"/>
+          <p:cNvPr id="37" name="TextBox 36"/>
+          <p:cNvSpPr txBox="1"/>
+          <p:nvPr/>
+        </p:nvSpPr>
+        <p:spPr>
+          <a:xfrm>
+            <a:off x="3657508" y="3655314"/>
             <a:ext cx="4145176" cy="644651"/>
           </a:xfrm>
           <a:prstGeom prst="rect">
@@ -13781,7 +14004,7 @@
           <a:p>
             <a:pPr algn="l"/>
             <a:r>
-              <a:rPr sz="750" b="0">
+              <a:rPr sz="800" b="0">
                 <a:solidFill>
                   <a:srgbClr val="1A1A1A"/>
                 </a:solidFill>
@@ -13794,13 +14017,13 @@
       </p:sp>
       <p:sp>
         <p:nvSpPr>
-          <p:cNvPr id="37" name="Rectangle 36"/>
+          <p:cNvPr id="38" name="Rectangle 37"/>
           <p:cNvSpPr/>
           <p:nvPr/>
         </p:nvSpPr>
         <p:spPr>
           <a:xfrm>
-            <a:off x="7680767" y="3284982"/>
+            <a:off x="7802684" y="3627882"/>
             <a:ext cx="4145176" cy="699516"/>
           </a:xfrm>
           <a:prstGeom prst="rect">
@@ -13840,13 +14063,13 @@
       </p:sp>
       <p:sp>
         <p:nvSpPr>
-          <p:cNvPr id="38" name="TextBox 37"/>
-          <p:cNvSpPr txBox="1"/>
-          <p:nvPr/>
-        </p:nvSpPr>
-        <p:spPr>
-          <a:xfrm>
-            <a:off x="7680767" y="3312414"/>
+          <p:cNvPr id="39" name="TextBox 38"/>
+          <p:cNvSpPr txBox="1"/>
+          <p:nvPr/>
+        </p:nvSpPr>
+        <p:spPr>
+          <a:xfrm>
+            <a:off x="7802684" y="3655314"/>
             <a:ext cx="4145176" cy="644651"/>
           </a:xfrm>
           <a:prstGeom prst="rect">
@@ -13862,7 +14085,7 @@
           <a:p>
             <a:pPr algn="l"/>
             <a:r>
-              <a:rPr sz="750" b="0">
+              <a:rPr sz="800" b="0">
                 <a:solidFill>
                   <a:srgbClr val="1A1A1A"/>
                 </a:solidFill>
@@ -13875,7 +14098,7 @@
       </p:sp>
       <p:sp>
         <p:nvSpPr>
-          <p:cNvPr id="39" name="TextBox 38"/>
+          <p:cNvPr id="40" name="TextBox 39"/>
           <p:cNvSpPr txBox="1"/>
           <p:nvPr/>
         </p:nvSpPr>
@@ -13910,7 +14133,7 @@
       </p:sp>
       <p:sp>
         <p:nvSpPr>
-          <p:cNvPr id="40" name="TextBox 39"/>
+          <p:cNvPr id="41" name="TextBox 40"/>
           <p:cNvSpPr txBox="1"/>
           <p:nvPr/>
         </p:nvSpPr>
